--- a/docs/slides/pptx/01-ai-family-tree-fr.pptx
+++ b/docs/slides/pptx/01-ai-family-tree-fr.pptx
@@ -19,6 +19,10 @@
     <p:sldId id="267" r:id="rId18"/>
     <p:sldId id="268" r:id="rId19"/>
     <p:sldId id="269" r:id="rId20"/>
+    <p:sldId id="270" r:id="rId21"/>
+    <p:sldId id="271" r:id="rId22"/>
+    <p:sldId id="272" r:id="rId23"/>
+    <p:sldId id="273" r:id="rId24"/>
   </p:sldIdLst>
   <p:sldSz cx="12191695" cy="6858000" type="screen4x3"/>
   <p:notesSz cx="6858000" cy="9144000"/>
@@ -3175,7 +3179,7 @@
                 </a:solidFill>
                 <a:latin typeface="Segoe UI"/>
               </a:rPr>
-              <a:t>BANQUE AFRICAINE DE DÉVELOPPEMENT · UA STATAFRIC · STG17 · JOUR 1</a:t>
+              <a:t>BANQUE AFRICAINE DE DÉVELOPPEMENT · UA STATAFRIC · STG17</a:t>
             </a:r>
           </a:p>
         </p:txBody>
@@ -3245,7 +3249,7 @@
                 </a:solidFill>
                 <a:latin typeface="Segoe UI"/>
               </a:rPr>
-              <a:t>Comment les concepts s'articulent — et lesquels ont leur place dans un office statistique</a:t>
+              <a:t>Huit mots qui décideront de ce que votre office achète, construit et peut défendre</a:t>
             </a:r>
           </a:p>
         </p:txBody>
@@ -3376,32 +3380,118 @@
                 </a:solidFill>
                 <a:latin typeface="Segoe UI"/>
               </a:rPr>
-              <a:t>Où chaque concept se place dans la chaîne de valeur statistique</a:t>
-            </a:r>
-          </a:p>
-        </p:txBody>
-      </p:sp>
-      <p:sp>
-        <p:nvSpPr>
-          <p:cNvPr id="4" name="Rectangle 3"/>
+              <a:t>Le RAG — ce que vous construisez à 14h45</a:t>
+            </a:r>
+          </a:p>
+        </p:txBody>
+      </p:sp>
+      <p:sp>
+        <p:nvSpPr>
+          <p:cNvPr id="4" name="TextBox 3"/>
+          <p:cNvSpPr txBox="1"/>
+          <p:nvPr/>
+        </p:nvSpPr>
+        <p:spPr>
+          <a:xfrm>
+            <a:off x="731520" y="1371600"/>
+            <a:ext cx="10728655" cy="640080"/>
+          </a:xfrm>
+          <a:prstGeom prst="rect">
+            <a:avLst/>
+          </a:prstGeom>
+          <a:noFill/>
+        </p:spPr>
+        <p:txBody>
+          <a:bodyPr wrap="square">
+            <a:spAutoFit/>
+          </a:bodyPr>
+          <a:lstStyle/>
+          <a:p>
+            <a:pPr algn="l"/>
+            <a:r>
+              <a:rPr sz="1100" b="0">
+                <a:solidFill>
+                  <a:srgbClr val="6B7B75"/>
+                </a:solidFill>
+                <a:latin typeface="Segoe UI"/>
+              </a:rPr>
+              <a:t>FIGURE — capturez la diapositive 10 du deck HTML et collez-la ici.</a:t>
+            </a:r>
+          </a:p>
+        </p:txBody>
+      </p:sp>
+      <p:sp>
+        <p:nvSpPr>
+          <p:cNvPr id="5" name="TextBox 4"/>
+          <p:cNvSpPr txBox="1"/>
+          <p:nvPr/>
+        </p:nvSpPr>
+        <p:spPr>
+          <a:xfrm>
+            <a:off x="731520" y="6400800"/>
+            <a:ext cx="10728655" cy="274320"/>
+          </a:xfrm>
+          <a:prstGeom prst="rect">
+            <a:avLst/>
+          </a:prstGeom>
+          <a:noFill/>
+        </p:spPr>
+        <p:txBody>
+          <a:bodyPr wrap="square">
+            <a:spAutoFit/>
+          </a:bodyPr>
+          <a:lstStyle/>
+          <a:p>
+            <a:pPr algn="l"/>
+            <a:r>
+              <a:rPr sz="900" b="0">
+                <a:solidFill>
+                  <a:srgbClr val="6B7B75"/>
+                </a:solidFill>
+                <a:latin typeface="Segoe UI"/>
+              </a:rPr>
+              <a:t>Banque africaine de développement · UA STATAFRIC · STG17</a:t>
+            </a:r>
+          </a:p>
+        </p:txBody>
+      </p:sp>
+    </p:spTree>
+  </p:cSld>
+  <p:clrMapOvr>
+    <a:masterClrMapping/>
+  </p:clrMapOvr>
+</p:sld>
+</file>
+
+<file path=ppt/slides/slide11.xml><?xml version="1.0" encoding="utf-8"?>
+<p:sld xmlns:a="http://schemas.openxmlformats.org/drawingml/2006/main" xmlns:p="http://schemas.openxmlformats.org/presentationml/2006/main" xmlns:r="http://schemas.openxmlformats.org/officeDocument/2006/relationships">
+  <p:cSld>
+    <p:spTree>
+      <p:nvGrpSpPr>
+        <p:cNvPr id="1" name=""/>
+        <p:cNvGrpSpPr/>
+        <p:nvPr/>
+      </p:nvGrpSpPr>
+      <p:grpSpPr/>
+      <p:sp>
+        <p:nvSpPr>
+          <p:cNvPr id="2" name="Rectangle 1"/>
           <p:cNvSpPr/>
           <p:nvPr/>
         </p:nvSpPr>
         <p:spPr>
           <a:xfrm>
-            <a:off x="731520" y="1371600"/>
-            <a:ext cx="10728655" cy="960120"/>
+            <a:off x="0" y="0"/>
+            <a:ext cx="12191695" cy="6858000"/>
           </a:xfrm>
           <a:prstGeom prst="rect">
             <a:avLst/>
           </a:prstGeom>
           <a:solidFill>
-            <a:srgbClr val="F4F8F5"/>
+            <a:srgbClr val="0B2545"/>
           </a:solidFill>
           <a:ln>
-            <a:solidFill>
-              <a:srgbClr val="1B7A43"/>
-            </a:solidFill>
+            <a:noFill/>
           </a:ln>
           <a:effectLst/>
         </p:spPr>
@@ -3420,39 +3510,856 @@
           </a:fontRef>
         </p:style>
         <p:txBody>
-          <a:bodyPr rtlCol="0" anchor="ctr" wrap="square"/>
+          <a:bodyPr rtlCol="0" anchor="ctr"/>
           <a:lstStyle/>
           <a:p>
             <a:pPr algn="ctr"/>
-            <a:r>
-              <a:rPr sz="1200">
-                <a:solidFill>
-                  <a:srgbClr val="33403A"/>
+          </a:p>
+        </p:txBody>
+      </p:sp>
+      <p:sp>
+        <p:nvSpPr>
+          <p:cNvPr id="3" name="TextBox 2"/>
+          <p:cNvSpPr txBox="1"/>
+          <p:nvPr/>
+        </p:nvSpPr>
+        <p:spPr>
+          <a:xfrm>
+            <a:off x="731520" y="502920"/>
+            <a:ext cx="10728655" cy="320040"/>
+          </a:xfrm>
+          <a:prstGeom prst="rect">
+            <a:avLst/>
+          </a:prstGeom>
+          <a:noFill/>
+        </p:spPr>
+        <p:txBody>
+          <a:bodyPr wrap="square">
+            <a:spAutoFit/>
+          </a:bodyPr>
+          <a:lstStyle/>
+          <a:p>
+            <a:pPr algn="l"/>
+            <a:r>
+              <a:rPr sz="1100" b="1">
+                <a:solidFill>
+                  <a:srgbClr val="F2A900"/>
                 </a:solidFill>
                 <a:latin typeface="Segoe UI"/>
               </a:rPr>
-              <a:t>IL EXISTE UN CADRE INTERNATIONAL POUR CELA — Le Groupe de haut niveau de la CEE-ONU pour la modernisation de la statistique
-officielle (HLG-MOS) a publié  Machine Learning for Official Statistics ,
-comprenant un  cadre de qualité  pour le choix des méthodes et des
-orientations pour passer de l'expérimentation à la production. Votre office n'a
-pas à inventer ses propres critères — et une proposition qui ignore un cadre
-international existant se conteste plus facilement qu'une proposition qui s'y
-confronte.</a:t>
+              <a:t>PARTIE 3 SUR 3</a:t>
+            </a:r>
+          </a:p>
+        </p:txBody>
+      </p:sp>
+      <p:sp>
+        <p:nvSpPr>
+          <p:cNvPr id="4" name="TextBox 3"/>
+          <p:cNvSpPr txBox="1"/>
+          <p:nvPr/>
+        </p:nvSpPr>
+        <p:spPr>
+          <a:xfrm>
+            <a:off x="731520" y="914400"/>
+            <a:ext cx="10728655" cy="914400"/>
+          </a:xfrm>
+          <a:prstGeom prst="rect">
+            <a:avLst/>
+          </a:prstGeom>
+          <a:noFill/>
+        </p:spPr>
+        <p:txBody>
+          <a:bodyPr wrap="square">
+            <a:spAutoFit/>
+          </a:bodyPr>
+          <a:lstStyle/>
+          <a:p>
+            <a:pPr algn="l"/>
+            <a:r>
+              <a:rPr sz="2800" b="1">
+                <a:solidFill>
+                  <a:srgbClr val="FFFFFF"/>
+                </a:solidFill>
+                <a:latin typeface="Segoe UI"/>
+              </a:rPr>
+              <a:t>Les agents, et où se place l'humain</a:t>
+            </a:r>
+          </a:p>
+        </p:txBody>
+      </p:sp>
+      <p:sp>
+        <p:nvSpPr>
+          <p:cNvPr id="5" name="TextBox 4"/>
+          <p:cNvSpPr txBox="1"/>
+          <p:nvPr/>
+        </p:nvSpPr>
+        <p:spPr>
+          <a:xfrm>
+            <a:off x="731520" y="1783080"/>
+            <a:ext cx="10728655" cy="548640"/>
+          </a:xfrm>
+          <a:prstGeom prst="rect">
+            <a:avLst/>
+          </a:prstGeom>
+          <a:noFill/>
+        </p:spPr>
+        <p:txBody>
+          <a:bodyPr wrap="square">
+            <a:spAutoFit/>
+          </a:bodyPr>
+          <a:lstStyle/>
+          <a:p>
+            <a:pPr algn="l"/>
+            <a:r>
+              <a:rPr sz="1400" b="0">
+                <a:solidFill>
+                  <a:srgbClr val="DBE7E0"/>
+                </a:solidFill>
+                <a:latin typeface="Segoe UI"/>
+              </a:rPr>
+              <a:t>De répondre à une question à accomplir une action.</a:t>
+            </a:r>
+          </a:p>
+        </p:txBody>
+      </p:sp>
+      <p:sp>
+        <p:nvSpPr>
+          <p:cNvPr id="6" name="TextBox 5"/>
+          <p:cNvSpPr txBox="1"/>
+          <p:nvPr/>
+        </p:nvSpPr>
+        <p:spPr>
+          <a:xfrm>
+            <a:off x="731520" y="6400800"/>
+            <a:ext cx="10728655" cy="274320"/>
+          </a:xfrm>
+          <a:prstGeom prst="rect">
+            <a:avLst/>
+          </a:prstGeom>
+          <a:noFill/>
+        </p:spPr>
+        <p:txBody>
+          <a:bodyPr wrap="square">
+            <a:spAutoFit/>
+          </a:bodyPr>
+          <a:lstStyle/>
+          <a:p>
+            <a:pPr algn="l"/>
+            <a:r>
+              <a:rPr sz="900" b="0">
+                <a:solidFill>
+                  <a:srgbClr val="6B7B75"/>
+                </a:solidFill>
+                <a:latin typeface="Segoe UI"/>
+              </a:rPr>
+              <a:t>Banque africaine de développement · UA STATAFRIC · STG17</a:t>
+            </a:r>
+          </a:p>
+        </p:txBody>
+      </p:sp>
+    </p:spTree>
+  </p:cSld>
+  <p:clrMapOvr>
+    <a:masterClrMapping/>
+  </p:clrMapOvr>
+</p:sld>
+</file>
+
+<file path=ppt/slides/slide12.xml><?xml version="1.0" encoding="utf-8"?>
+<p:sld xmlns:a="http://schemas.openxmlformats.org/drawingml/2006/main" xmlns:p="http://schemas.openxmlformats.org/presentationml/2006/main" xmlns:r="http://schemas.openxmlformats.org/officeDocument/2006/relationships">
+  <p:cSld>
+    <p:spTree>
+      <p:nvGrpSpPr>
+        <p:cNvPr id="1" name=""/>
+        <p:cNvGrpSpPr/>
+        <p:nvPr/>
+      </p:nvGrpSpPr>
+      <p:grpSpPr/>
+      <p:sp>
+        <p:nvSpPr>
+          <p:cNvPr id="2" name="Rectangle 1"/>
+          <p:cNvSpPr/>
+          <p:nvPr/>
+        </p:nvSpPr>
+        <p:spPr>
+          <a:xfrm>
+            <a:off x="0" y="0"/>
+            <a:ext cx="12191695" cy="60000"/>
+          </a:xfrm>
+          <a:prstGeom prst="rect">
+            <a:avLst/>
+          </a:prstGeom>
+          <a:solidFill>
+            <a:srgbClr val="F2A900"/>
+          </a:solidFill>
+          <a:ln>
+            <a:noFill/>
+          </a:ln>
+        </p:spPr>
+        <p:style>
+          <a:lnRef idx="1">
+            <a:schemeClr val="accent1"/>
+          </a:lnRef>
+          <a:fillRef idx="3">
+            <a:schemeClr val="accent1"/>
+          </a:fillRef>
+          <a:effectRef idx="2">
+            <a:schemeClr val="accent1"/>
+          </a:effectRef>
+          <a:fontRef idx="minor">
+            <a:schemeClr val="lt1"/>
+          </a:fontRef>
+        </p:style>
+        <p:txBody>
+          <a:bodyPr rtlCol="0" anchor="ctr"/>
+          <a:lstStyle/>
+          <a:p>
+            <a:pPr algn="ctr"/>
+          </a:p>
+        </p:txBody>
+      </p:sp>
+      <p:sp>
+        <p:nvSpPr>
+          <p:cNvPr id="3" name="TextBox 2"/>
+          <p:cNvSpPr txBox="1"/>
+          <p:nvPr/>
+        </p:nvSpPr>
+        <p:spPr>
+          <a:xfrm>
+            <a:off x="731520" y="502920"/>
+            <a:ext cx="10728655" cy="914400"/>
+          </a:xfrm>
+          <a:prstGeom prst="rect">
+            <a:avLst/>
+          </a:prstGeom>
+          <a:noFill/>
+        </p:spPr>
+        <p:txBody>
+          <a:bodyPr wrap="square">
+            <a:spAutoFit/>
+          </a:bodyPr>
+          <a:lstStyle/>
+          <a:p>
+            <a:pPr algn="l"/>
+            <a:r>
+              <a:rPr sz="2800" b="1">
+                <a:solidFill>
+                  <a:srgbClr val="0B2545"/>
+                </a:solidFill>
+                <a:latin typeface="Segoe UI"/>
+              </a:rPr>
+              <a:t>Assistant contre agent</a:t>
             </a:r>
           </a:p>
         </p:txBody>
       </p:sp>
       <p:graphicFrame>
         <p:nvGraphicFramePr>
-          <p:cNvPr id="5" name="Table 4"/>
+          <p:cNvPr id="4" name="Table 3"/>
           <p:cNvGraphicFramePr>
             <a:graphicFrameLocks noGrp="1"/>
           </p:cNvGraphicFramePr>
           <p:nvPr/>
         </p:nvGraphicFramePr>
         <p:xfrm>
-          <a:off x="731520" y="2468880"/>
-          <a:ext cx="10728655" cy="2048256"/>
+          <a:off x="731520" y="1371600"/>
+          <a:ext cx="10728655" cy="1463040"/>
+        </p:xfrm>
+        <a:graphic>
+          <a:graphicData uri="http://schemas.openxmlformats.org/drawingml/2006/table">
+            <a:tbl>
+              <a:tblPr firstRow="1" bandRow="1">
+                <a:tableStyleId>{5C22544A-7EE6-4342-B048-85BDC9FD1C3A}</a:tableStyleId>
+              </a:tblPr>
+              <a:tblGrid>
+                <a:gridCol w="3576218"/>
+                <a:gridCol w="3576218"/>
+                <a:gridCol w="3576219"/>
+              </a:tblGrid>
+              <a:tr h="292608">
+                <a:tc>
+                  <a:txBody>
+                    <a:bodyPr/>
+                    <a:lstStyle/>
+                    <a:p/>
+                  </a:txBody>
+                  <a:tcPr/>
+                </a:tc>
+                <a:tc>
+                  <a:txBody>
+                    <a:bodyPr/>
+                    <a:lstStyle/>
+                    <a:p>
+                      <a:r>
+                        <a:rPr sz="1000" b="1">
+                          <a:solidFill>
+                            <a:srgbClr val="FFFFFF"/>
+                          </a:solidFill>
+                          <a:latin typeface="Segoe UI"/>
+                        </a:rPr>
+                        <a:t>Assistant · 14h45</a:t>
+                      </a:r>
+                    </a:p>
+                  </a:txBody>
+                  <a:tcPr/>
+                </a:tc>
+                <a:tc>
+                  <a:txBody>
+                    <a:bodyPr/>
+                    <a:lstStyle/>
+                    <a:p>
+                      <a:r>
+                        <a:rPr sz="1000" b="1">
+                          <a:solidFill>
+                            <a:srgbClr val="FFFFFF"/>
+                          </a:solidFill>
+                          <a:latin typeface="Segoe UI"/>
+                        </a:rPr>
+                        <a:t>Agent · 15h45</a:t>
+                      </a:r>
+                    </a:p>
+                  </a:txBody>
+                  <a:tcPr/>
+                </a:tc>
+              </a:tr>
+              <a:tr h="292608">
+                <a:tc>
+                  <a:txBody>
+                    <a:bodyPr/>
+                    <a:lstStyle/>
+                    <a:p>
+                      <a:r>
+                        <a:rPr sz="1000" b="0">
+                          <a:solidFill>
+                            <a:srgbClr val="33403A"/>
+                          </a:solidFill>
+                          <a:latin typeface="Segoe UI"/>
+                        </a:rPr>
+                        <a:t>Fait</a:t>
+                      </a:r>
+                    </a:p>
+                  </a:txBody>
+                  <a:tcPr/>
+                </a:tc>
+                <a:tc>
+                  <a:txBody>
+                    <a:bodyPr/>
+                    <a:lstStyle/>
+                    <a:p>
+                      <a:r>
+                        <a:rPr sz="1000" b="0">
+                          <a:solidFill>
+                            <a:srgbClr val="33403A"/>
+                          </a:solidFill>
+                          <a:latin typeface="Segoe UI"/>
+                        </a:rPr>
+                        <a:t>Lit, rédige une réponse</a:t>
+                      </a:r>
+                    </a:p>
+                  </a:txBody>
+                  <a:tcPr/>
+                </a:tc>
+                <a:tc>
+                  <a:txBody>
+                    <a:bodyPr/>
+                    <a:lstStyle/>
+                    <a:p>
+                      <a:r>
+                        <a:rPr sz="1000" b="0">
+                          <a:solidFill>
+                            <a:srgbClr val="33403A"/>
+                          </a:solidFill>
+                          <a:latin typeface="Segoe UI"/>
+                        </a:rPr>
+                        <a:t>Lit, choisit un outil, l'appelle, recommence</a:t>
+                      </a:r>
+                    </a:p>
+                  </a:txBody>
+                  <a:tcPr/>
+                </a:tc>
+              </a:tr>
+              <a:tr h="292608">
+                <a:tc>
+                  <a:txBody>
+                    <a:bodyPr/>
+                    <a:lstStyle/>
+                    <a:p>
+                      <a:r>
+                        <a:rPr sz="1000" b="0">
+                          <a:solidFill>
+                            <a:srgbClr val="33403A"/>
+                          </a:solidFill>
+                          <a:latin typeface="Segoe UI"/>
+                        </a:rPr>
+                        <a:t>Choisit les étapes</a:t>
+                      </a:r>
+                    </a:p>
+                  </a:txBody>
+                  <a:tcPr/>
+                </a:tc>
+                <a:tc>
+                  <a:txBody>
+                    <a:bodyPr/>
+                    <a:lstStyle/>
+                    <a:p>
+                      <a:r>
+                        <a:rPr sz="1000" b="0">
+                          <a:solidFill>
+                            <a:srgbClr val="33403A"/>
+                          </a:solidFill>
+                          <a:latin typeface="Segoe UI"/>
+                        </a:rPr>
+                        <a:t>Vous, dans la chaîne</a:t>
+                      </a:r>
+                    </a:p>
+                  </a:txBody>
+                  <a:tcPr/>
+                </a:tc>
+                <a:tc>
+                  <a:txBody>
+                    <a:bodyPr/>
+                    <a:lstStyle/>
+                    <a:p>
+                      <a:r>
+                        <a:rPr sz="1000" b="0">
+                          <a:solidFill>
+                            <a:srgbClr val="33403A"/>
+                          </a:solidFill>
+                          <a:latin typeface="Segoe UI"/>
+                        </a:rPr>
+                        <a:t>Le modèle, à l'exécution</a:t>
+                      </a:r>
+                    </a:p>
+                  </a:txBody>
+                  <a:tcPr/>
+                </a:tc>
+              </a:tr>
+              <a:tr h="292608">
+                <a:tc>
+                  <a:txBody>
+                    <a:bodyPr/>
+                    <a:lstStyle/>
+                    <a:p>
+                      <a:r>
+                        <a:rPr sz="1000" b="0">
+                          <a:solidFill>
+                            <a:srgbClr val="33403A"/>
+                          </a:solidFill>
+                          <a:latin typeface="Segoe UI"/>
+                        </a:rPr>
+                        <a:t>L'échec est</a:t>
+                      </a:r>
+                    </a:p>
+                  </a:txBody>
+                  <a:tcPr/>
+                </a:tc>
+                <a:tc>
+                  <a:txBody>
+                    <a:bodyPr/>
+                    <a:lstStyle/>
+                    <a:p>
+                      <a:r>
+                        <a:rPr sz="1000" b="0">
+                          <a:solidFill>
+                            <a:srgbClr val="33403A"/>
+                          </a:solidFill>
+                          <a:latin typeface="Segoe UI"/>
+                        </a:rPr>
+                        <a:t>Une phrase fausse</a:t>
+                      </a:r>
+                    </a:p>
+                  </a:txBody>
+                  <a:tcPr/>
+                </a:tc>
+                <a:tc>
+                  <a:txBody>
+                    <a:bodyPr/>
+                    <a:lstStyle/>
+                    <a:p>
+                      <a:r>
+                        <a:rPr sz="1000" b="0">
+                          <a:solidFill>
+                            <a:srgbClr val="33403A"/>
+                          </a:solidFill>
+                          <a:latin typeface="Segoe UI"/>
+                        </a:rPr>
+                        <a:t>Une phrase fausse — ou une action fausse</a:t>
+                      </a:r>
+                    </a:p>
+                  </a:txBody>
+                  <a:tcPr/>
+                </a:tc>
+              </a:tr>
+              <a:tr h="292608">
+                <a:tc>
+                  <a:txBody>
+                    <a:bodyPr/>
+                    <a:lstStyle/>
+                    <a:p>
+                      <a:r>
+                        <a:rPr sz="1000" b="0">
+                          <a:solidFill>
+                            <a:srgbClr val="33403A"/>
+                          </a:solidFill>
+                          <a:latin typeface="Segoe UI"/>
+                        </a:rPr>
+                        <a:t>L'humain vérifie</a:t>
+                      </a:r>
+                    </a:p>
+                  </a:txBody>
+                  <a:tcPr/>
+                </a:tc>
+                <a:tc>
+                  <a:txBody>
+                    <a:bodyPr/>
+                    <a:lstStyle/>
+                    <a:p>
+                      <a:r>
+                        <a:rPr sz="1000" b="0">
+                          <a:solidFill>
+                            <a:srgbClr val="33403A"/>
+                          </a:solidFill>
+                          <a:latin typeface="Segoe UI"/>
+                        </a:rPr>
+                        <a:t>La sortie</a:t>
+                      </a:r>
+                    </a:p>
+                  </a:txBody>
+                  <a:tcPr/>
+                </a:tc>
+                <a:tc>
+                  <a:txBody>
+                    <a:bodyPr/>
+                    <a:lstStyle/>
+                    <a:p>
+                      <a:r>
+                        <a:rPr sz="1000" b="0">
+                          <a:solidFill>
+                            <a:srgbClr val="33403A"/>
+                          </a:solidFill>
+                          <a:latin typeface="Segoe UI"/>
+                        </a:rPr>
+                        <a:t>La sortie  et  chaque action</a:t>
+                      </a:r>
+                    </a:p>
+                  </a:txBody>
+                  <a:tcPr/>
+                </a:tc>
+              </a:tr>
+            </a:tbl>
+          </a:graphicData>
+        </a:graphic>
+      </p:graphicFrame>
+      <p:sp>
+        <p:nvSpPr>
+          <p:cNvPr id="5" name="TextBox 4"/>
+          <p:cNvSpPr txBox="1"/>
+          <p:nvPr/>
+        </p:nvSpPr>
+        <p:spPr>
+          <a:xfrm>
+            <a:off x="731520" y="6400800"/>
+            <a:ext cx="10728655" cy="274320"/>
+          </a:xfrm>
+          <a:prstGeom prst="rect">
+            <a:avLst/>
+          </a:prstGeom>
+          <a:noFill/>
+        </p:spPr>
+        <p:txBody>
+          <a:bodyPr wrap="square">
+            <a:spAutoFit/>
+          </a:bodyPr>
+          <a:lstStyle/>
+          <a:p>
+            <a:pPr algn="l"/>
+            <a:r>
+              <a:rPr sz="900" b="0">
+                <a:solidFill>
+                  <a:srgbClr val="6B7B75"/>
+                </a:solidFill>
+                <a:latin typeface="Segoe UI"/>
+              </a:rPr>
+              <a:t>Banque africaine de développement · UA STATAFRIC · STG17</a:t>
+            </a:r>
+          </a:p>
+        </p:txBody>
+      </p:sp>
+    </p:spTree>
+  </p:cSld>
+  <p:clrMapOvr>
+    <a:masterClrMapping/>
+  </p:clrMapOvr>
+</p:sld>
+</file>
+
+<file path=ppt/slides/slide13.xml><?xml version="1.0" encoding="utf-8"?>
+<p:sld xmlns:a="http://schemas.openxmlformats.org/drawingml/2006/main" xmlns:p="http://schemas.openxmlformats.org/presentationml/2006/main" xmlns:r="http://schemas.openxmlformats.org/officeDocument/2006/relationships">
+  <p:cSld>
+    <p:spTree>
+      <p:nvGrpSpPr>
+        <p:cNvPr id="1" name=""/>
+        <p:cNvGrpSpPr/>
+        <p:nvPr/>
+      </p:nvGrpSpPr>
+      <p:grpSpPr/>
+      <p:sp>
+        <p:nvSpPr>
+          <p:cNvPr id="2" name="Rectangle 1"/>
+          <p:cNvSpPr/>
+          <p:nvPr/>
+        </p:nvSpPr>
+        <p:spPr>
+          <a:xfrm>
+            <a:off x="0" y="0"/>
+            <a:ext cx="12191695" cy="60000"/>
+          </a:xfrm>
+          <a:prstGeom prst="rect">
+            <a:avLst/>
+          </a:prstGeom>
+          <a:solidFill>
+            <a:srgbClr val="F2A900"/>
+          </a:solidFill>
+          <a:ln>
+            <a:noFill/>
+          </a:ln>
+        </p:spPr>
+        <p:style>
+          <a:lnRef idx="1">
+            <a:schemeClr val="accent1"/>
+          </a:lnRef>
+          <a:fillRef idx="3">
+            <a:schemeClr val="accent1"/>
+          </a:fillRef>
+          <a:effectRef idx="2">
+            <a:schemeClr val="accent1"/>
+          </a:effectRef>
+          <a:fontRef idx="minor">
+            <a:schemeClr val="lt1"/>
+          </a:fontRef>
+        </p:style>
+        <p:txBody>
+          <a:bodyPr rtlCol="0" anchor="ctr"/>
+          <a:lstStyle/>
+          <a:p>
+            <a:pPr algn="ctr"/>
+          </a:p>
+        </p:txBody>
+      </p:sp>
+      <p:sp>
+        <p:nvSpPr>
+          <p:cNvPr id="3" name="TextBox 2"/>
+          <p:cNvSpPr txBox="1"/>
+          <p:nvPr/>
+        </p:nvSpPr>
+        <p:spPr>
+          <a:xfrm>
+            <a:off x="731520" y="502920"/>
+            <a:ext cx="10728655" cy="320040"/>
+          </a:xfrm>
+          <a:prstGeom prst="rect">
+            <a:avLst/>
+          </a:prstGeom>
+          <a:noFill/>
+        </p:spPr>
+        <p:txBody>
+          <a:bodyPr wrap="square">
+            <a:spAutoFit/>
+          </a:bodyPr>
+          <a:lstStyle/>
+          <a:p>
+            <a:pPr algn="l"/>
+            <a:r>
+              <a:rPr sz="1100" b="1">
+                <a:solidFill>
+                  <a:srgbClr val="1B7A43"/>
+                </a:solidFill>
+                <a:latin typeface="Segoe UI"/>
+              </a:rPr>
+              <a:t>L'INTERSTICE QUI COMPTE</a:t>
+            </a:r>
+          </a:p>
+        </p:txBody>
+      </p:sp>
+      <p:sp>
+        <p:nvSpPr>
+          <p:cNvPr id="4" name="TextBox 3"/>
+          <p:cNvSpPr txBox="1"/>
+          <p:nvPr/>
+        </p:nvSpPr>
+        <p:spPr>
+          <a:xfrm>
+            <a:off x="731520" y="914400"/>
+            <a:ext cx="10728655" cy="548640"/>
+          </a:xfrm>
+          <a:prstGeom prst="rect">
+            <a:avLst/>
+          </a:prstGeom>
+          <a:noFill/>
+        </p:spPr>
+        <p:txBody>
+          <a:bodyPr wrap="square">
+            <a:spAutoFit/>
+          </a:bodyPr>
+          <a:lstStyle/>
+          <a:p>
+            <a:pPr algn="l"/>
+            <a:r>
+              <a:rPr sz="1400" b="0">
+                <a:solidFill>
+                  <a:srgbClr val="33403A"/>
+                </a:solidFill>
+                <a:latin typeface="Segoe UI"/>
+              </a:rPr>
+              <a:t>Tous les points d'approbation, journaux d'audit et contrôles de sûreté vivent
+dans cet interstice. Concevez-le avant d'en avoir besoin — il ne s'ajoute pas
+après coup.</a:t>
+            </a:r>
+          </a:p>
+        </p:txBody>
+      </p:sp>
+      <p:sp>
+        <p:nvSpPr>
+          <p:cNvPr id="5" name="TextBox 4"/>
+          <p:cNvSpPr txBox="1"/>
+          <p:nvPr/>
+        </p:nvSpPr>
+        <p:spPr>
+          <a:xfrm>
+            <a:off x="731520" y="6400800"/>
+            <a:ext cx="10728655" cy="274320"/>
+          </a:xfrm>
+          <a:prstGeom prst="rect">
+            <a:avLst/>
+          </a:prstGeom>
+          <a:noFill/>
+        </p:spPr>
+        <p:txBody>
+          <a:bodyPr wrap="square">
+            <a:spAutoFit/>
+          </a:bodyPr>
+          <a:lstStyle/>
+          <a:p>
+            <a:pPr algn="l"/>
+            <a:r>
+              <a:rPr sz="900" b="0">
+                <a:solidFill>
+                  <a:srgbClr val="6B7B75"/>
+                </a:solidFill>
+                <a:latin typeface="Segoe UI"/>
+              </a:rPr>
+              <a:t>Banque africaine de développement · UA STATAFRIC · STG17</a:t>
+            </a:r>
+          </a:p>
+        </p:txBody>
+      </p:sp>
+    </p:spTree>
+  </p:cSld>
+  <p:clrMapOvr>
+    <a:masterClrMapping/>
+  </p:clrMapOvr>
+</p:sld>
+</file>
+
+<file path=ppt/slides/slide14.xml><?xml version="1.0" encoding="utf-8"?>
+<p:sld xmlns:a="http://schemas.openxmlformats.org/drawingml/2006/main" xmlns:p="http://schemas.openxmlformats.org/presentationml/2006/main" xmlns:r="http://schemas.openxmlformats.org/officeDocument/2006/relationships">
+  <p:cSld>
+    <p:spTree>
+      <p:nvGrpSpPr>
+        <p:cNvPr id="1" name=""/>
+        <p:cNvGrpSpPr/>
+        <p:nvPr/>
+      </p:nvGrpSpPr>
+      <p:grpSpPr/>
+      <p:sp>
+        <p:nvSpPr>
+          <p:cNvPr id="2" name="Rectangle 1"/>
+          <p:cNvSpPr/>
+          <p:nvPr/>
+        </p:nvSpPr>
+        <p:spPr>
+          <a:xfrm>
+            <a:off x="0" y="0"/>
+            <a:ext cx="12191695" cy="60000"/>
+          </a:xfrm>
+          <a:prstGeom prst="rect">
+            <a:avLst/>
+          </a:prstGeom>
+          <a:solidFill>
+            <a:srgbClr val="F2A900"/>
+          </a:solidFill>
+          <a:ln>
+            <a:noFill/>
+          </a:ln>
+        </p:spPr>
+        <p:style>
+          <a:lnRef idx="1">
+            <a:schemeClr val="accent1"/>
+          </a:lnRef>
+          <a:fillRef idx="3">
+            <a:schemeClr val="accent1"/>
+          </a:fillRef>
+          <a:effectRef idx="2">
+            <a:schemeClr val="accent1"/>
+          </a:effectRef>
+          <a:fontRef idx="minor">
+            <a:schemeClr val="lt1"/>
+          </a:fontRef>
+        </p:style>
+        <p:txBody>
+          <a:bodyPr rtlCol="0" anchor="ctr"/>
+          <a:lstStyle/>
+          <a:p>
+            <a:pPr algn="ctr"/>
+          </a:p>
+        </p:txBody>
+      </p:sp>
+      <p:sp>
+        <p:nvSpPr>
+          <p:cNvPr id="3" name="TextBox 2"/>
+          <p:cNvSpPr txBox="1"/>
+          <p:nvPr/>
+        </p:nvSpPr>
+        <p:spPr>
+          <a:xfrm>
+            <a:off x="731520" y="502920"/>
+            <a:ext cx="10728655" cy="914400"/>
+          </a:xfrm>
+          <a:prstGeom prst="rect">
+            <a:avLst/>
+          </a:prstGeom>
+          <a:noFill/>
+        </p:spPr>
+        <p:txBody>
+          <a:bodyPr wrap="square">
+            <a:spAutoFit/>
+          </a:bodyPr>
+          <a:lstStyle/>
+          <a:p>
+            <a:pPr algn="l"/>
+            <a:r>
+              <a:rPr sz="2800" b="1">
+                <a:solidFill>
+                  <a:srgbClr val="0B2545"/>
+                </a:solidFill>
+                <a:latin typeface="Segoe UI"/>
+              </a:rPr>
+              <a:t>Où chaque levier se place</a:t>
+            </a:r>
+          </a:p>
+        </p:txBody>
+      </p:sp>
+      <p:graphicFrame>
+        <p:nvGraphicFramePr>
+          <p:cNvPr id="4" name="Table 3"/>
+          <p:cNvGraphicFramePr>
+            <a:graphicFrameLocks noGrp="1"/>
+          </p:cNvGraphicFramePr>
+          <p:nvPr/>
+        </p:nvGraphicFramePr>
+        <p:xfrm>
+          <a:off x="731520" y="1371600"/>
+          <a:ext cx="10728655" cy="1463040"/>
         </p:xfrm>
         <a:graphic>
           <a:graphicData uri="http://schemas.openxmlformats.org/drawingml/2006/table">
@@ -3497,7 +4404,7 @@
                           </a:solidFill>
                           <a:latin typeface="Segoe UI"/>
                         </a:rPr>
-                        <a:t>Usage plausible</a:t>
+                        <a:t>Usage</a:t>
                       </a:r>
                     </a:p>
                   </a:txBody>
@@ -3515,7 +4422,7 @@
                           </a:solidFill>
                           <a:latin typeface="Segoe UI"/>
                         </a:rPr>
-                        <a:t>Le bon levier</a:t>
+                        <a:t>Levier</a:t>
                       </a:r>
                     </a:p>
                   </a:txBody>
@@ -3533,7 +4440,7 @@
                           </a:solidFill>
                           <a:latin typeface="Segoe UI"/>
                         </a:rPr>
-                        <a:t>Contrôle non négociable</a:t>
+                        <a:t>Contrôle</a:t>
                       </a:r>
                     </a:p>
                   </a:txBody>
@@ -3571,7 +4478,7 @@
                           </a:solidFill>
                           <a:latin typeface="Segoe UI"/>
                         </a:rPr>
-                        <a:t>Classer des réponses d'enquête en texte libre ; coder des professions</a:t>
+                        <a:t>Coder des réponses libres</a:t>
                       </a:r>
                     </a:p>
                   </a:txBody>
@@ -3589,7 +4496,7 @@
                           </a:solidFill>
                           <a:latin typeface="Segoe UI"/>
                         </a:rPr>
-                        <a:t>Prompt, ou un petit classifieur entraîné</a:t>
+                        <a:t>Prompt</a:t>
                       </a:r>
                     </a:p>
                   </a:txBody>
@@ -3607,7 +4514,7 @@
                           </a:solidFill>
                           <a:latin typeface="Segoe UI"/>
                         </a:rPr>
-                        <a:t>Un jeu d'évaluation étiqueté — mesuré, non supposé</a:t>
+                        <a:t>Un jeu d'évaluation étiqueté</a:t>
                       </a:r>
                     </a:p>
                   </a:txBody>
@@ -3645,81 +4552,7 @@
                           </a:solidFill>
                           <a:latin typeface="Segoe UI"/>
                         </a:rPr>
-                        <a:t>Extraire les tableaux d'une publication PDF</a:t>
-                      </a:r>
-                    </a:p>
-                  </a:txBody>
-                  <a:tcPr/>
-                </a:tc>
-                <a:tc>
-                  <a:txBody>
-                    <a:bodyPr/>
-                    <a:lstStyle/>
-                    <a:p>
-                      <a:r>
-                        <a:rPr sz="1000" b="0">
-                          <a:solidFill>
-                            <a:srgbClr val="33403A"/>
-                          </a:solidFill>
-                          <a:latin typeface="Segoe UI"/>
-                        </a:rPr>
-                        <a:t>Prompt + sortie structurée</a:t>
-                      </a:r>
-                    </a:p>
-                  </a:txBody>
-                  <a:tcPr/>
-                </a:tc>
-                <a:tc>
-                  <a:txBody>
-                    <a:bodyPr/>
-                    <a:lstStyle/>
-                    <a:p>
-                      <a:r>
-                        <a:rPr sz="1000" b="0">
-                          <a:solidFill>
-                            <a:srgbClr val="33403A"/>
-                          </a:solidFill>
-                          <a:latin typeface="Segoe UI"/>
-                        </a:rPr>
-                        <a:t>Vérification contre la source. Jour 2 matin</a:t>
-                      </a:r>
-                    </a:p>
-                  </a:txBody>
-                  <a:tcPr/>
-                </a:tc>
-              </a:tr>
-              <a:tr h="292608">
-                <a:tc>
-                  <a:txBody>
-                    <a:bodyPr/>
-                    <a:lstStyle/>
-                    <a:p>
-                      <a:r>
-                        <a:rPr sz="1000" b="0">
-                          <a:solidFill>
-                            <a:srgbClr val="33403A"/>
-                          </a:solidFill>
-                          <a:latin typeface="Segoe UI"/>
-                        </a:rPr>
-                        <a:t>Analyse</a:t>
-                      </a:r>
-                    </a:p>
-                  </a:txBody>
-                  <a:tcPr/>
-                </a:tc>
-                <a:tc>
-                  <a:txBody>
-                    <a:bodyPr/>
-                    <a:lstStyle/>
-                    <a:p>
-                      <a:r>
-                        <a:rPr sz="1000" b="0">
-                          <a:solidFill>
-                            <a:srgbClr val="33403A"/>
-                          </a:solidFill>
-                          <a:latin typeface="Segoe UI"/>
-                        </a:rPr>
-                        <a:t>Écrire et déboguer le code d'analyse lui-même</a:t>
+                        <a:t>Extraire des tableaux d'un PDF</a:t>
                       </a:r>
                     </a:p>
                   </a:txBody>
@@ -3755,7 +4588,7 @@
                           </a:solidFill>
                           <a:latin typeface="Segoe UI"/>
                         </a:rPr>
-                        <a:t>Le code est lu et exécuté par un statisticien</a:t>
+                        <a:t>Vérification contre la source</a:t>
                       </a:r>
                     </a:p>
                   </a:txBody>
@@ -3793,7 +4626,7 @@
                           </a:solidFill>
                           <a:latin typeface="Segoe UI"/>
                         </a:rPr>
-                        <a:t>Répondre aux questions du public sur vos publications</a:t>
+                        <a:t>Répondre aux questions du public</a:t>
                       </a:r>
                     </a:p>
                   </a:txBody>
@@ -3829,7 +4662,7 @@
                           </a:solidFill>
                           <a:latin typeface="Segoe UI"/>
                         </a:rPr>
-                        <a:t>Chaque réponse porte son passage source</a:t>
+                        <a:t>Chaque réponse cite sa source</a:t>
                       </a:r>
                     </a:p>
                   </a:txBody>
@@ -3867,7 +4700,7 @@
                           </a:solidFill>
                           <a:latin typeface="Segoe UI"/>
                         </a:rPr>
-                        <a:t>Rédiger notes méthodologiques et métadonnées</a:t>
+                        <a:t>Rédiger des notes méthodologiques</a:t>
                       </a:r>
                     </a:p>
                   </a:txBody>
@@ -3885,7 +4718,7 @@
                           </a:solidFill>
                           <a:latin typeface="Segoe UI"/>
                         </a:rPr>
-                        <a:t>Prompt, ou RAG sur les notes passées</a:t>
+                        <a:t>Prompt</a:t>
                       </a:r>
                     </a:p>
                   </a:txBody>
@@ -3903,73 +4736,9 @@
                           </a:solidFill>
                           <a:latin typeface="Segoe UI"/>
                         </a:rPr>
-                        <a:t>Validé par le responsable de la méthode</a:t>
+                        <a:t>Validé par le responsable méthode</a:t>
                       </a:r>
                     </a:p>
-                  </a:txBody>
-                  <a:tcPr/>
-                </a:tc>
-              </a:tr>
-              <a:tr h="292608">
-                <a:tc>
-                  <a:txBody>
-                    <a:bodyPr/>
-                    <a:lstStyle/>
-                    <a:p>
-                      <a:r>
-                        <a:rPr sz="1000" b="0">
-                          <a:solidFill>
-                            <a:srgbClr val="33403A"/>
-                          </a:solidFill>
-                          <a:latin typeface="Segoe UI"/>
-                        </a:rPr>
-                        <a:t>Estimation</a:t>
-                      </a:r>
-                    </a:p>
-                  </a:txBody>
-                  <a:tcPr/>
-                </a:tc>
-                <a:tc>
-                  <a:txBody>
-                    <a:bodyPr/>
-                    <a:lstStyle/>
-                    <a:p>
-                      <a:r>
-                        <a:rPr sz="1000" b="0">
-                          <a:solidFill>
-                            <a:srgbClr val="33403A"/>
-                          </a:solidFill>
-                          <a:latin typeface="Segoe UI"/>
-                        </a:rPr>
-                        <a:t>Produire un chiffre officiel directement à partir d'un modèle.  Absent de</a:t>
-                      </a:r>
-                    </a:p>
-                    <a:p>
-                      <a:r>
-                        <a:t>    cette liste, et de toute liste. Un modèle de langage produit le plausible, pas le mesuré.</a:t>
-                      </a:r>
-                    </a:p>
-                    <a:p>
-                      <a:r>
-                        <a:t>    Utilisez-le autour de vos statistiques, jamais à leur place.</a:t>
-                      </a:r>
-                    </a:p>
-                  </a:txBody>
-                  <a:tcPr/>
-                </a:tc>
-                <a:tc>
-                  <a:txBody>
-                    <a:bodyPr/>
-                    <a:lstStyle/>
-                    <a:p/>
-                  </a:txBody>
-                  <a:tcPr/>
-                </a:tc>
-                <a:tc>
-                  <a:txBody>
-                    <a:bodyPr/>
-                    <a:lstStyle/>
-                    <a:p/>
                   </a:txBody>
                   <a:tcPr/>
                 </a:tc>
@@ -3980,7 +4749,7 @@
       </p:graphicFrame>
       <p:sp>
         <p:nvSpPr>
-          <p:cNvPr id="6" name="TextBox 5"/>
+          <p:cNvPr id="5" name="TextBox 4"/>
           <p:cNvSpPr txBox="1"/>
           <p:nvPr/>
         </p:nvSpPr>
@@ -4021,7 +4790,7 @@
 </p:sld>
 </file>
 
-<file path=ppt/slides/slide11.xml><?xml version="1.0" encoding="utf-8"?>
+<file path=ppt/slides/slide15.xml><?xml version="1.0" encoding="utf-8"?>
 <p:sld xmlns:a="http://schemas.openxmlformats.org/drawingml/2006/main" xmlns:p="http://schemas.openxmlformats.org/presentationml/2006/main" xmlns:r="http://schemas.openxmlformats.org/officeDocument/2006/relationships">
   <p:cSld>
     <p:spTree>
@@ -4083,7 +4852,7 @@
         <p:spPr>
           <a:xfrm>
             <a:off x="731520" y="502920"/>
-            <a:ext cx="10728655" cy="914400"/>
+            <a:ext cx="10728655" cy="320040"/>
           </a:xfrm>
           <a:prstGeom prst="rect">
             <a:avLst/>
@@ -4098,40 +4867,126 @@
           <a:p>
             <a:pPr algn="l"/>
             <a:r>
-              <a:rPr sz="2800" b="1">
-                <a:solidFill>
-                  <a:srgbClr val="0B2545"/>
+              <a:rPr sz="1100" b="1">
+                <a:solidFill>
+                  <a:srgbClr val="1B7A43"/>
                 </a:solidFill>
                 <a:latin typeface="Segoe UI"/>
               </a:rPr>
-              <a:t>Huit mots, fixés pour la semaine</a:t>
-            </a:r>
-          </a:p>
-        </p:txBody>
-      </p:sp>
-      <p:sp>
-        <p:nvSpPr>
-          <p:cNvPr id="4" name="Rectangle 3"/>
+              <a:t>LA LIMITE QUE NOUS NE FRANCHISSONS PAS</a:t>
+            </a:r>
+          </a:p>
+        </p:txBody>
+      </p:sp>
+      <p:sp>
+        <p:nvSpPr>
+          <p:cNvPr id="4" name="TextBox 3"/>
+          <p:cNvSpPr txBox="1"/>
+          <p:nvPr/>
+        </p:nvSpPr>
+        <p:spPr>
+          <a:xfrm>
+            <a:off x="731520" y="914400"/>
+            <a:ext cx="10728655" cy="548640"/>
+          </a:xfrm>
+          <a:prstGeom prst="rect">
+            <a:avLst/>
+          </a:prstGeom>
+          <a:noFill/>
+        </p:spPr>
+        <p:txBody>
+          <a:bodyPr wrap="square">
+            <a:spAutoFit/>
+          </a:bodyPr>
+          <a:lstStyle/>
+          <a:p>
+            <a:pPr algn="l"/>
+            <a:r>
+              <a:rPr sz="1400" b="0">
+                <a:solidFill>
+                  <a:srgbClr val="33403A"/>
+                </a:solidFill>
+                <a:latin typeface="Segoe UI"/>
+              </a:rPr>
+              <a:t>Un modèle de langage produit le plausible, pas le mesuré. Utilisez-le
+ autour  de vos statistiques — jamais à leur place.</a:t>
+            </a:r>
+          </a:p>
+        </p:txBody>
+      </p:sp>
+      <p:sp>
+        <p:nvSpPr>
+          <p:cNvPr id="5" name="TextBox 4"/>
+          <p:cNvSpPr txBox="1"/>
+          <p:nvPr/>
+        </p:nvSpPr>
+        <p:spPr>
+          <a:xfrm>
+            <a:off x="731520" y="6400800"/>
+            <a:ext cx="10728655" cy="274320"/>
+          </a:xfrm>
+          <a:prstGeom prst="rect">
+            <a:avLst/>
+          </a:prstGeom>
+          <a:noFill/>
+        </p:spPr>
+        <p:txBody>
+          <a:bodyPr wrap="square">
+            <a:spAutoFit/>
+          </a:bodyPr>
+          <a:lstStyle/>
+          <a:p>
+            <a:pPr algn="l"/>
+            <a:r>
+              <a:rPr sz="900" b="0">
+                <a:solidFill>
+                  <a:srgbClr val="6B7B75"/>
+                </a:solidFill>
+                <a:latin typeface="Segoe UI"/>
+              </a:rPr>
+              <a:t>Banque africaine de développement · UA STATAFRIC · STG17</a:t>
+            </a:r>
+          </a:p>
+        </p:txBody>
+      </p:sp>
+    </p:spTree>
+  </p:cSld>
+  <p:clrMapOvr>
+    <a:masterClrMapping/>
+  </p:clrMapOvr>
+</p:sld>
+</file>
+
+<file path=ppt/slides/slide16.xml><?xml version="1.0" encoding="utf-8"?>
+<p:sld xmlns:a="http://schemas.openxmlformats.org/drawingml/2006/main" xmlns:p="http://schemas.openxmlformats.org/presentationml/2006/main" xmlns:r="http://schemas.openxmlformats.org/officeDocument/2006/relationships">
+  <p:cSld>
+    <p:spTree>
+      <p:nvGrpSpPr>
+        <p:cNvPr id="1" name=""/>
+        <p:cNvGrpSpPr/>
+        <p:nvPr/>
+      </p:nvGrpSpPr>
+      <p:grpSpPr/>
+      <p:sp>
+        <p:nvSpPr>
+          <p:cNvPr id="2" name="Rectangle 1"/>
           <p:cNvSpPr/>
           <p:nvPr/>
         </p:nvSpPr>
         <p:spPr>
           <a:xfrm>
-            <a:off x="731520" y="1371600"/>
-            <a:ext cx="10728655" cy="960120"/>
+            <a:off x="0" y="0"/>
+            <a:ext cx="12191695" cy="60000"/>
           </a:xfrm>
           <a:prstGeom prst="rect">
             <a:avLst/>
           </a:prstGeom>
           <a:solidFill>
-            <a:srgbClr val="F4F8F5"/>
+            <a:srgbClr val="F2A900"/>
           </a:solidFill>
           <a:ln>
-            <a:solidFill>
-              <a:srgbClr val="1B7A43"/>
-            </a:solidFill>
+            <a:noFill/>
           </a:ln>
-          <a:effectLst/>
         </p:spPr>
         <p:style>
           <a:lnRef idx="1">
@@ -4148,207 +5003,51 @@
           </a:fontRef>
         </p:style>
         <p:txBody>
-          <a:bodyPr rtlCol="0" anchor="ctr" wrap="square"/>
+          <a:bodyPr rtlCol="0" anchor="ctr"/>
           <a:lstStyle/>
           <a:p>
             <a:pPr algn="ctr"/>
-            <a:r>
-              <a:rPr sz="1200">
-                <a:solidFill>
-                  <a:srgbClr val="33403A"/>
+          </a:p>
+        </p:txBody>
+      </p:sp>
+      <p:sp>
+        <p:nvSpPr>
+          <p:cNvPr id="3" name="TextBox 2"/>
+          <p:cNvSpPr txBox="1"/>
+          <p:nvPr/>
+        </p:nvSpPr>
+        <p:spPr>
+          <a:xfrm>
+            <a:off x="731520" y="502920"/>
+            <a:ext cx="10728655" cy="914400"/>
+          </a:xfrm>
+          <a:prstGeom prst="rect">
+            <a:avLst/>
+          </a:prstGeom>
+          <a:noFill/>
+        </p:spPr>
+        <p:txBody>
+          <a:bodyPr wrap="square">
+            <a:spAutoFit/>
+          </a:bodyPr>
+          <a:lstStyle/>
+          <a:p>
+            <a:pPr algn="l"/>
+            <a:r>
+              <a:rPr sz="2800" b="1">
+                <a:solidFill>
+                  <a:srgbClr val="0B2545"/>
                 </a:solidFill>
                 <a:latin typeface="Segoe UI"/>
               </a:rPr>
-              <a:t>LA DISCIPLINE QUE CELA VOUS ACHÈTE — Quand quelqu'un de votre office dira « l'agent utilisera le RAG pour affiner les
-réponses », vous saurez désormais que cette phrase contient trois termes et ne
-décrit aucun système cohérent — et vous pourrez poser la question qui débloque le
-projet :  lequel des trois leviers est-ce, et par rapport à quoi le
-mesurons-nous ?</a:t>
-            </a:r>
-          </a:p>
-        </p:txBody>
-      </p:sp>
-      <p:graphicFrame>
-        <p:nvGraphicFramePr>
-          <p:cNvPr id="5" name="Table 4"/>
-          <p:cNvGraphicFramePr>
-            <a:graphicFrameLocks noGrp="1"/>
-          </p:cNvGraphicFramePr>
-          <p:nvPr/>
-        </p:nvGraphicFramePr>
-        <p:xfrm>
-          <a:off x="731520" y="2468880"/>
-          <a:ext cx="10728655" cy="1170432"/>
-        </p:xfrm>
-        <a:graphic>
-          <a:graphicData uri="http://schemas.openxmlformats.org/drawingml/2006/table">
-            <a:tbl>
-              <a:tblPr firstRow="1" bandRow="1">
-                <a:tableStyleId>{5C22544A-7EE6-4342-B048-85BDC9FD1C3A}</a:tableStyleId>
-              </a:tblPr>
-              <a:tblGrid>
-                <a:gridCol w="5364327"/>
-                <a:gridCol w="5364328"/>
-              </a:tblGrid>
-              <a:tr h="292608">
-                <a:tc>
-                  <a:txBody>
-                    <a:bodyPr/>
-                    <a:lstStyle/>
-                    <a:p>
-                      <a:r>
-                        <a:rPr sz="1000" b="1">
-                          <a:solidFill>
-                            <a:srgbClr val="FFFFFF"/>
-                          </a:solidFill>
-                          <a:latin typeface="Segoe UI"/>
-                        </a:rPr>
-                        <a:t>LLM</a:t>
-                      </a:r>
-                    </a:p>
-                  </a:txBody>
-                  <a:tcPr/>
-                </a:tc>
-                <a:tc>
-                  <a:txBody>
-                    <a:bodyPr/>
-                    <a:lstStyle/>
-                    <a:p>
-                      <a:r>
-                        <a:rPr sz="1000" b="1">
-                          <a:solidFill>
-                            <a:srgbClr val="FFFFFF"/>
-                          </a:solidFill>
-                          <a:latin typeface="Segoe UI"/>
-                        </a:rPr>
-                        <a:t>Un prédicteur de token suivant entraîné sur un très grand corpus de texte. Pas une base de données.</a:t>
-                      </a:r>
-                    </a:p>
-                  </a:txBody>
-                  <a:tcPr/>
-                </a:tc>
-              </a:tr>
-              <a:tr h="292608">
-                <a:tc>
-                  <a:txBody>
-                    <a:bodyPr/>
-                    <a:lstStyle/>
-                    <a:p>
-                      <a:r>
-                        <a:rPr sz="1000" b="0">
-                          <a:solidFill>
-                            <a:srgbClr val="33403A"/>
-                          </a:solidFill>
-                          <a:latin typeface="Segoe UI"/>
-                        </a:rPr>
-                        <a:t>Token</a:t>
-                      </a:r>
-                    </a:p>
-                  </a:txBody>
-                  <a:tcPr/>
-                </a:tc>
-                <a:tc>
-                  <a:txBody>
-                    <a:bodyPr/>
-                    <a:lstStyle/>
-                    <a:p>
-                      <a:r>
-                        <a:rPr sz="1000" b="0">
-                          <a:solidFill>
-                            <a:srgbClr val="33403A"/>
-                          </a:solidFill>
-                          <a:latin typeface="Segoe UI"/>
-                        </a:rPr>
-                        <a:t>L'unité sous-lexicale que le modèle lit et écrit. Coûts et limites de contexte se comptent en tokens, pas en mots.</a:t>
-                      </a:r>
-                    </a:p>
-                  </a:txBody>
-                  <a:tcPr/>
-                </a:tc>
-              </a:tr>
-              <a:tr h="292608">
-                <a:tc>
-                  <a:txBody>
-                    <a:bodyPr/>
-                    <a:lstStyle/>
-                    <a:p>
-                      <a:r>
-                        <a:rPr sz="1000" b="0">
-                          <a:solidFill>
-                            <a:srgbClr val="33403A"/>
-                          </a:solidFill>
-                          <a:latin typeface="Segoe UI"/>
-                        </a:rPr>
-                        <a:t>Ingénierie de prompt</a:t>
-                      </a:r>
-                    </a:p>
-                  </a:txBody>
-                  <a:tcPr/>
-                </a:tc>
-                <a:tc>
-                  <a:txBody>
-                    <a:bodyPr/>
-                    <a:lstStyle/>
-                    <a:p>
-                      <a:r>
-                        <a:rPr sz="1000" b="0">
-                          <a:solidFill>
-                            <a:srgbClr val="33403A"/>
-                          </a:solidFill>
-                          <a:latin typeface="Segoe UI"/>
-                        </a:rPr>
-                        <a:t>Façonner l' entrée . Gratuit, immédiat, et le levier à épuiser en premier.</a:t>
-                      </a:r>
-                    </a:p>
-                  </a:txBody>
-                  <a:tcPr/>
-                </a:tc>
-              </a:tr>
-              <a:tr h="292608">
-                <a:tc>
-                  <a:txBody>
-                    <a:bodyPr/>
-                    <a:lstStyle/>
-                    <a:p>
-                      <a:r>
-                        <a:rPr sz="1000" b="0">
-                          <a:solidFill>
-                            <a:srgbClr val="33403A"/>
-                          </a:solidFill>
-                          <a:latin typeface="Segoe UI"/>
-                        </a:rPr>
-                        <a:t>RAG</a:t>
-                      </a:r>
-                    </a:p>
-                  </a:txBody>
-                  <a:tcPr/>
-                </a:tc>
-                <a:tc>
-                  <a:txBody>
-                    <a:bodyPr/>
-                    <a:lstStyle/>
-                    <a:p>
-                      <a:r>
-                        <a:rPr sz="1000" b="0">
-                          <a:solidFill>
-                            <a:srgbClr val="33403A"/>
-                          </a:solidFill>
-                          <a:latin typeface="Segoe UI"/>
-                        </a:rPr>
-                        <a:t>Façonner le  contexte  — récupérer vos documents pour que la réponse soit ancrée et citable.</a:t>
-                      </a:r>
-                    </a:p>
-                  </a:txBody>
-                  <a:tcPr/>
-                </a:tc>
-              </a:tr>
-            </a:tbl>
-          </a:graphicData>
-        </a:graphic>
-      </p:graphicFrame>
-      <p:sp>
-        <p:nvSpPr>
-          <p:cNvPr id="6" name="TextBox 5"/>
+              <a:t>Les huit mots</a:t>
+            </a:r>
+          </a:p>
+        </p:txBody>
+      </p:sp>
+      <p:sp>
+        <p:nvSpPr>
+          <p:cNvPr id="4" name="TextBox 3"/>
           <p:cNvSpPr txBox="1"/>
           <p:nvPr/>
         </p:nvSpPr>
@@ -4389,7 +5088,7 @@
 </p:sld>
 </file>
 
-<file path=ppt/slides/slide12.xml><?xml version="1.0" encoding="utf-8"?>
+<file path=ppt/slides/slide17.xml><?xml version="1.0" encoding="utf-8"?>
 <p:sld xmlns:a="http://schemas.openxmlformats.org/drawingml/2006/main" xmlns:p="http://schemas.openxmlformats.org/presentationml/2006/main" xmlns:r="http://schemas.openxmlformats.org/officeDocument/2006/relationships">
   <p:cSld>
     <p:spTree>
@@ -4543,8 +5242,7 @@
                 </a:solidFill>
                 <a:latin typeface="Segoe UI"/>
               </a:rPr>
-              <a:t>Huit minutes chacun, six diapositives, et la moitié la
-plus utile est ce qui n'a pas fonctionné.</a:t>
+              <a:t>Huit minutes chacun. Six diapositives. La moitié la plus utile est ce qui n'a pas marché.</a:t>
             </a:r>
           </a:p>
         </p:txBody>
@@ -4579,9 +5277,10 @@
                 </a:solidFill>
                 <a:latin typeface="Segoe UI"/>
               </a:rPr>
-              <a:t>14h00 — Infrastructure de l'IA : ce qu'exige réellement son exploitation dans un office statistique 
-14h45 — Laboratoire : construire l'assistant RAG de cette présentation 
-15h45 — Laboratoire : le transformer en agent, et trouver où il doit rester supervisé</a:t>
+              <a:t>14h00 · Infrastructure de l'IA — ce qu'elle exige réellement 
+14h45 · Laboratoire — construire l'assistant RAG 
+15h45 · Laboratoire — le transformer en agent  
+Bibliographie complète : site de l'atelier → Ressources → Références</a:t>
             </a:r>
           </a:p>
         </p:txBody>
@@ -4629,344 +5328,7 @@
 </p:sld>
 </file>
 
-<file path=ppt/slides/slide13.xml><?xml version="1.0" encoding="utf-8"?>
-<p:sld xmlns:a="http://schemas.openxmlformats.org/drawingml/2006/main" xmlns:p="http://schemas.openxmlformats.org/presentationml/2006/main" xmlns:r="http://schemas.openxmlformats.org/officeDocument/2006/relationships">
-  <p:cSld>
-    <p:spTree>
-      <p:nvGrpSpPr>
-        <p:cNvPr id="1" name=""/>
-        <p:cNvGrpSpPr/>
-        <p:nvPr/>
-      </p:nvGrpSpPr>
-      <p:grpSpPr/>
-      <p:sp>
-        <p:nvSpPr>
-          <p:cNvPr id="2" name="Rectangle 1"/>
-          <p:cNvSpPr/>
-          <p:nvPr/>
-        </p:nvSpPr>
-        <p:spPr>
-          <a:xfrm>
-            <a:off x="0" y="0"/>
-            <a:ext cx="12191695" cy="60000"/>
-          </a:xfrm>
-          <a:prstGeom prst="rect">
-            <a:avLst/>
-          </a:prstGeom>
-          <a:solidFill>
-            <a:srgbClr val="F2A900"/>
-          </a:solidFill>
-          <a:ln>
-            <a:noFill/>
-          </a:ln>
-        </p:spPr>
-        <p:style>
-          <a:lnRef idx="1">
-            <a:schemeClr val="accent1"/>
-          </a:lnRef>
-          <a:fillRef idx="3">
-            <a:schemeClr val="accent1"/>
-          </a:fillRef>
-          <a:effectRef idx="2">
-            <a:schemeClr val="accent1"/>
-          </a:effectRef>
-          <a:fontRef idx="minor">
-            <a:schemeClr val="lt1"/>
-          </a:fontRef>
-        </p:style>
-        <p:txBody>
-          <a:bodyPr rtlCol="0" anchor="ctr"/>
-          <a:lstStyle/>
-          <a:p>
-            <a:pPr algn="ctr"/>
-          </a:p>
-        </p:txBody>
-      </p:sp>
-      <p:sp>
-        <p:nvSpPr>
-          <p:cNvPr id="3" name="TextBox 2"/>
-          <p:cNvSpPr txBox="1"/>
-          <p:nvPr/>
-        </p:nvSpPr>
-        <p:spPr>
-          <a:xfrm>
-            <a:off x="731520" y="502920"/>
-            <a:ext cx="10728655" cy="914400"/>
-          </a:xfrm>
-          <a:prstGeom prst="rect">
-            <a:avLst/>
-          </a:prstGeom>
-          <a:noFill/>
-        </p:spPr>
-        <p:txBody>
-          <a:bodyPr wrap="square">
-            <a:spAutoFit/>
-          </a:bodyPr>
-          <a:lstStyle/>
-          <a:p>
-            <a:pPr algn="l"/>
-            <a:r>
-              <a:rPr sz="2800" b="1">
-                <a:solidFill>
-                  <a:srgbClr val="0B2545"/>
-                </a:solidFill>
-                <a:latin typeface="Segoe UI"/>
-              </a:rPr>
-              <a:t>Références</a:t>
-            </a:r>
-          </a:p>
-        </p:txBody>
-      </p:sp>
-      <p:sp>
-        <p:nvSpPr>
-          <p:cNvPr id="4" name="TextBox 3"/>
-          <p:cNvSpPr txBox="1"/>
-          <p:nvPr/>
-        </p:nvSpPr>
-        <p:spPr>
-          <a:xfrm>
-            <a:off x="731520" y="1371600"/>
-            <a:ext cx="10728655" cy="548640"/>
-          </a:xfrm>
-          <a:prstGeom prst="rect">
-            <a:avLst/>
-          </a:prstGeom>
-          <a:noFill/>
-        </p:spPr>
-        <p:txBody>
-          <a:bodyPr wrap="square">
-            <a:spAutoFit/>
-          </a:bodyPr>
-          <a:lstStyle/>
-          <a:p>
-            <a:pPr algn="l"/>
-            <a:r>
-              <a:rPr sz="1400" b="0">
-                <a:solidFill>
-                  <a:srgbClr val="33403A"/>
-                </a:solidFill>
-                <a:latin typeface="Segoe UI"/>
-              </a:rPr>
-              <a:t>La liste annotée complète, avec liens actifs, est sur le site de l'atelier, sous Ressources.</a:t>
-            </a:r>
-          </a:p>
-        </p:txBody>
-      </p:sp>
-      <p:sp>
-        <p:nvSpPr>
-          <p:cNvPr id="5" name="TextBox 4"/>
-          <p:cNvSpPr txBox="1"/>
-          <p:nvPr/>
-        </p:nvSpPr>
-        <p:spPr>
-          <a:xfrm>
-            <a:off x="731520" y="1874520"/>
-            <a:ext cx="10728655" cy="3886200"/>
-          </a:xfrm>
-          <a:prstGeom prst="rect">
-            <a:avLst/>
-          </a:prstGeom>
-          <a:noFill/>
-        </p:spPr>
-        <p:txBody>
-          <a:bodyPr wrap="square">
-            <a:spAutoFit/>
-          </a:bodyPr>
-          <a:lstStyle/>
-          <a:p>
-            <a:pPr>
-              <a:spcAft>
-                <a:spcPts val="700"/>
-              </a:spcAft>
-            </a:pPr>
-            <a:r>
-              <a:rPr sz="1400">
-                <a:solidFill>
-                  <a:srgbClr val="33403A"/>
-                </a:solidFill>
-                <a:latin typeface="Segoe UI"/>
-              </a:rPr>
-              <a:t>•  Vaswani, A., Shazeer, N., Parmar, N., Uszkoreit, J., Jones, L., Gomez, A.N., et al. 
-(2017). Attention Is All You Need.  Advances in Neural Information Processing
-Systems  30.  L'architecture transformeur sur laquelle repose tout modèle de cette présentation.</a:t>
-            </a:r>
-          </a:p>
-          <a:p>
-            <a:pPr>
-              <a:spcAft>
-                <a:spcPts val="700"/>
-              </a:spcAft>
-            </a:pPr>
-            <a:r>
-              <a:rPr sz="1400">
-                <a:solidFill>
-                  <a:srgbClr val="33403A"/>
-                </a:solidFill>
-                <a:latin typeface="Segoe UI"/>
-              </a:rPr>
-              <a:t>•  Brown, T.B., et al.  (2020). Language Models are Few-Shot Learners.
- Advances in Neural Information Processing Systems  33. 
- Pourquoi donner quelques exemples au modèle dans le prompt fonctionne.</a:t>
-            </a:r>
-          </a:p>
-          <a:p>
-            <a:pPr>
-              <a:spcAft>
-                <a:spcPts val="700"/>
-              </a:spcAft>
-            </a:pPr>
-            <a:r>
-              <a:rPr sz="1400">
-                <a:solidFill>
-                  <a:srgbClr val="33403A"/>
-                </a:solidFill>
-                <a:latin typeface="Segoe UI"/>
-              </a:rPr>
-              <a:t>•  Lewis, P., Perez, E., Piktus, A., Petroni, F., Karpukhin, V., Goyal, N., et al. 
-(2020). Retrieval-Augmented Generation for Knowledge-Intensive NLP Tasks.
- Advances in Neural Information Processing Systems  33. 
- L'article fondateur du RAG — le motif que vous construisez cet après-midi.</a:t>
-            </a:r>
-          </a:p>
-          <a:p>
-            <a:pPr>
-              <a:spcAft>
-                <a:spcPts val="700"/>
-              </a:spcAft>
-            </a:pPr>
-            <a:r>
-              <a:rPr sz="1400">
-                <a:solidFill>
-                  <a:srgbClr val="33403A"/>
-                </a:solidFill>
-                <a:latin typeface="Segoe UI"/>
-              </a:rPr>
-              <a:t>•  Hu, E.J., Shen, Y., Wallis, P., Allen-Zhu, Z., Li, Y., Wang, S., et al.  (2021).
-LoRA: Low-Rank Adaptation of Large Language Models.  arXiv:2106.09685  ;
-ICLR 2022.  Pourquoi l'affinage est désormais abordable — et reste le mauvais premier levier.</a:t>
-            </a:r>
-          </a:p>
-          <a:p>
-            <a:pPr>
-              <a:spcAft>
-                <a:spcPts val="700"/>
-              </a:spcAft>
-            </a:pPr>
-            <a:r>
-              <a:rPr sz="1400">
-                <a:solidFill>
-                  <a:srgbClr val="33403A"/>
-                </a:solidFill>
-                <a:latin typeface="Segoe UI"/>
-              </a:rPr>
-              <a:t>•  Wei, J., Wang, X., Schuurmans, D., Bosma, M., Ichter, B., Xia, F., et al.  (2022).
-Chain-of-Thought Prompting Elicits Reasoning in Large Language Models.
- Advances in Neural Information Processing Systems  35. 
- Le résultat de prompting derrière une grande partie du Jour 2 matin.</a:t>
-            </a:r>
-          </a:p>
-          <a:p>
-            <a:pPr>
-              <a:spcAft>
-                <a:spcPts val="700"/>
-              </a:spcAft>
-            </a:pPr>
-            <a:r>
-              <a:rPr sz="1400">
-                <a:solidFill>
-                  <a:srgbClr val="33403A"/>
-                </a:solidFill>
-                <a:latin typeface="Segoe UI"/>
-              </a:rPr>
-              <a:t>•  Ji, Z., Lee, N., Frieske, R., Yu, T., Su, D., Xu, Y., et al.  (2023).
-Survey of Hallucination in Natural Language Generation.  ACM Computing Surveys ,
-55(12), 1-38.  L'hallucination comme propriété du mécanisme, non comme défaut à corriger.</a:t>
-            </a:r>
-          </a:p>
-          <a:p>
-            <a:pPr>
-              <a:spcAft>
-                <a:spcPts val="700"/>
-              </a:spcAft>
-            </a:pPr>
-            <a:r>
-              <a:rPr sz="1400">
-                <a:solidFill>
-                  <a:srgbClr val="33403A"/>
-                </a:solidFill>
-                <a:latin typeface="Segoe UI"/>
-              </a:rPr>
-              <a:t>•  Groupe de haut niveau de la CEE-ONU pour la modernisation de la statistique officielle. 
- Machine Learning for Official Statistics  — productions du projet apprentissage
-automatique, dont des orientations sur l'usage éthique et un cadre de qualité.
- statswiki.unece.org  
- Le cadre méthodologique international. Citez-le plutôt que d'inventer vos propres critères.</a:t>
-            </a:r>
-          </a:p>
-          <a:p>
-            <a:pPr>
-              <a:spcAft>
-                <a:spcPts val="700"/>
-              </a:spcAft>
-            </a:pPr>
-            <a:r>
-              <a:rPr sz="1400">
-                <a:solidFill>
-                  <a:srgbClr val="33403A"/>
-                </a:solidFill>
-                <a:latin typeface="Segoe UI"/>
-              </a:rPr>
-              <a:t>•  Model Context Protocol.  Spécification ouverte pour connecter les modèles aux
-outils et aux sources de données.  modelcontextprotocol.io  
- Écrire un outil une fois ; le réutiliser entre systèmes plutôt que par fournisseur.</a:t>
-            </a:r>
-          </a:p>
-        </p:txBody>
-      </p:sp>
-      <p:sp>
-        <p:nvSpPr>
-          <p:cNvPr id="6" name="TextBox 5"/>
-          <p:cNvSpPr txBox="1"/>
-          <p:nvPr/>
-        </p:nvSpPr>
-        <p:spPr>
-          <a:xfrm>
-            <a:off x="731520" y="6400800"/>
-            <a:ext cx="10728655" cy="274320"/>
-          </a:xfrm>
-          <a:prstGeom prst="rect">
-            <a:avLst/>
-          </a:prstGeom>
-          <a:noFill/>
-        </p:spPr>
-        <p:txBody>
-          <a:bodyPr wrap="square">
-            <a:spAutoFit/>
-          </a:bodyPr>
-          <a:lstStyle/>
-          <a:p>
-            <a:pPr algn="l"/>
-            <a:r>
-              <a:rPr sz="900" b="0">
-                <a:solidFill>
-                  <a:srgbClr val="6B7B75"/>
-                </a:solidFill>
-                <a:latin typeface="Segoe UI"/>
-              </a:rPr>
-              <a:t>Banque africaine de développement · UA STATAFRIC · STG17</a:t>
-            </a:r>
-          </a:p>
-        </p:txBody>
-      </p:sp>
-    </p:spTree>
-  </p:cSld>
-  <p:clrMapOvr>
-    <a:masterClrMapping/>
-  </p:clrMapOvr>
-</p:sld>
-</file>
-
-<file path=ppt/slides/slide14.xml><?xml version="1.0" encoding="utf-8"?>
+<file path=ppt/slides/slide18.xml><?xml version="1.0" encoding="utf-8"?>
 <p:sld xmlns:a="http://schemas.openxmlformats.org/drawingml/2006/main" xmlns:p="http://schemas.openxmlformats.org/presentationml/2006/main" xmlns:r="http://schemas.openxmlformats.org/officeDocument/2006/relationships">
   <p:cSld>
     <p:spTree>
@@ -5128,7 +5490,7 @@
         <p:spPr>
           <a:xfrm>
             <a:off x="731520" y="502920"/>
-            <a:ext cx="10728655" cy="914400"/>
+            <a:ext cx="10728655" cy="320040"/>
           </a:xfrm>
           <a:prstGeom prst="rect">
             <a:avLst/>
@@ -5143,13 +5505,13 @@
           <a:p>
             <a:pPr algn="l"/>
             <a:r>
-              <a:rPr sz="2800" b="1">
-                <a:solidFill>
-                  <a:srgbClr val="0B2545"/>
+              <a:rPr sz="1100" b="1">
+                <a:solidFill>
+                  <a:srgbClr val="1B7A43"/>
                 </a:solidFill>
                 <a:latin typeface="Segoe UI"/>
               </a:rPr>
-              <a:t>Pourquoi une demi-heure sur du vocabulaire</a:t>
+              <a:t>NOTRE POINT DE DÉPART</a:t>
             </a:r>
           </a:p>
         </p:txBody>
@@ -5162,8 +5524,8 @@
         </p:nvSpPr>
         <p:spPr>
           <a:xfrm>
-            <a:off x="731520" y="1371600"/>
-            <a:ext cx="10728655" cy="548640"/>
+            <a:off x="731520" y="914400"/>
+            <a:ext cx="10728655" cy="914400"/>
           </a:xfrm>
           <a:prstGeom prst="rect">
             <a:avLst/>
@@ -5178,14 +5540,13 @@
           <a:p>
             <a:pPr algn="l"/>
             <a:r>
-              <a:rPr sz="1400" b="0">
-                <a:solidFill>
-                  <a:srgbClr val="33403A"/>
+              <a:rPr sz="2800" b="1">
+                <a:solidFill>
+                  <a:srgbClr val="0B2545"/>
                 </a:solidFill>
                 <a:latin typeface="Segoe UI"/>
               </a:rPr>
-              <a:t>Trois phrases, toutes réellement apparues dans des cahiers des charges
-d'offices statistiques :</a:t>
+              <a:t>Trois phrases tirées de vrais cahiers des charges</a:t>
             </a:r>
           </a:p>
         </p:txBody>
@@ -5193,193 +5554,6 @@
       <p:sp>
         <p:nvSpPr>
           <p:cNvPr id="5" name="TextBox 4"/>
-          <p:cNvSpPr txBox="1"/>
-          <p:nvPr/>
-        </p:nvSpPr>
-        <p:spPr>
-          <a:xfrm>
-            <a:off x="731520" y="1874520"/>
-            <a:ext cx="10728655" cy="548640"/>
-          </a:xfrm>
-          <a:prstGeom prst="rect">
-            <a:avLst/>
-          </a:prstGeom>
-          <a:noFill/>
-        </p:spPr>
-        <p:txBody>
-          <a:bodyPr wrap="square">
-            <a:spAutoFit/>
-          </a:bodyPr>
-          <a:lstStyle/>
-          <a:p>
-            <a:pPr algn="l"/>
-            <a:r>
-              <a:rPr sz="1400" b="0">
-                <a:solidFill>
-                  <a:srgbClr val="33403A"/>
-                </a:solidFill>
-                <a:latin typeface="Segoe UI"/>
-              </a:rPr>
-              <a:t>Chacune décrit un système  différent , au coût
-différent, au risque différent, et avec une réponse différente à « qui répond de
-la sortie ». La troisième, en particulier, décrit généralement quelque chose que
-son auteur n'avait pas en tête et n'aurait pas financé.</a:t>
-            </a:r>
-          </a:p>
-        </p:txBody>
-      </p:sp>
-      <p:sp>
-        <p:nvSpPr>
-          <p:cNvPr id="6" name="TextBox 5"/>
-          <p:cNvSpPr txBox="1"/>
-          <p:nvPr/>
-        </p:nvSpPr>
-        <p:spPr>
-          <a:xfrm>
-            <a:off x="731520" y="2377440"/>
-            <a:ext cx="10728655" cy="457200"/>
-          </a:xfrm>
-          <a:prstGeom prst="rect">
-            <a:avLst/>
-          </a:prstGeom>
-          <a:noFill/>
-        </p:spPr>
-        <p:txBody>
-          <a:bodyPr wrap="square">
-            <a:spAutoFit/>
-          </a:bodyPr>
-          <a:lstStyle/>
-          <a:p>
-            <a:pPr algn="l"/>
-            <a:r>
-              <a:rPr sz="1500" b="1">
-                <a:solidFill>
-                  <a:srgbClr val="1B7A43"/>
-                </a:solidFill>
-                <a:latin typeface="Segoe UI"/>
-              </a:rPr>
-              <a:t>8  Termes fixés aujourd'hui</a:t>
-            </a:r>
-          </a:p>
-        </p:txBody>
-      </p:sp>
-      <p:sp>
-        <p:nvSpPr>
-          <p:cNvPr id="7" name="Rectangle 6"/>
-          <p:cNvSpPr/>
-          <p:nvPr/>
-        </p:nvSpPr>
-        <p:spPr>
-          <a:xfrm>
-            <a:off x="731520" y="2926080"/>
-            <a:ext cx="10728655" cy="960120"/>
-          </a:xfrm>
-          <a:prstGeom prst="rect">
-            <a:avLst/>
-          </a:prstGeom>
-          <a:solidFill>
-            <a:srgbClr val="F4F8F5"/>
-          </a:solidFill>
-          <a:ln>
-            <a:solidFill>
-              <a:srgbClr val="1B7A43"/>
-            </a:solidFill>
-          </a:ln>
-          <a:effectLst/>
-        </p:spPr>
-        <p:style>
-          <a:lnRef idx="1">
-            <a:schemeClr val="accent1"/>
-          </a:lnRef>
-          <a:fillRef idx="3">
-            <a:schemeClr val="accent1"/>
-          </a:fillRef>
-          <a:effectRef idx="2">
-            <a:schemeClr val="accent1"/>
-          </a:effectRef>
-          <a:fontRef idx="minor">
-            <a:schemeClr val="lt1"/>
-          </a:fontRef>
-        </p:style>
-        <p:txBody>
-          <a:bodyPr rtlCol="0" anchor="ctr" wrap="square"/>
-          <a:lstStyle/>
-          <a:p>
-            <a:pPr algn="ctr"/>
-            <a:r>
-              <a:rPr sz="1200">
-                <a:solidFill>
-                  <a:srgbClr val="33403A"/>
-                </a:solidFill>
-                <a:latin typeface="Segoe UI"/>
-              </a:rPr>
-              <a:t>VUES SUR LE TERRAIN — « Il nous faut une IA pour répondre aux questions sur nos publications. »  
- « L'agent utilisera l'apprentissage automatique pour classer les réponses. »  
- « Nous allons affiner le modèle sur nos données pour qu'il connaisse nos statistiques. »</a:t>
-            </a:r>
-          </a:p>
-        </p:txBody>
-      </p:sp>
-      <p:sp>
-        <p:nvSpPr>
-          <p:cNvPr id="8" name="Rectangle 7"/>
-          <p:cNvSpPr/>
-          <p:nvPr/>
-        </p:nvSpPr>
-        <p:spPr>
-          <a:xfrm>
-            <a:off x="731520" y="4023360"/>
-            <a:ext cx="10728655" cy="960120"/>
-          </a:xfrm>
-          <a:prstGeom prst="rect">
-            <a:avLst/>
-          </a:prstGeom>
-          <a:solidFill>
-            <a:srgbClr val="F4F8F5"/>
-          </a:solidFill>
-          <a:ln>
-            <a:solidFill>
-              <a:srgbClr val="1B7A43"/>
-            </a:solidFill>
-          </a:ln>
-          <a:effectLst/>
-        </p:spPr>
-        <p:style>
-          <a:lnRef idx="1">
-            <a:schemeClr val="accent1"/>
-          </a:lnRef>
-          <a:fillRef idx="3">
-            <a:schemeClr val="accent1"/>
-          </a:fillRef>
-          <a:effectRef idx="2">
-            <a:schemeClr val="accent1"/>
-          </a:effectRef>
-          <a:fontRef idx="minor">
-            <a:schemeClr val="lt1"/>
-          </a:fontRef>
-        </p:style>
-        <p:txBody>
-          <a:bodyPr rtlCol="0" anchor="ctr" wrap="square"/>
-          <a:lstStyle/>
-          <a:p>
-            <a:pPr algn="ctr"/>
-            <a:r>
-              <a:rPr sz="1200">
-                <a:solidFill>
-                  <a:srgbClr val="33403A"/>
-                </a:solidFill>
-                <a:latin typeface="Segoe UI"/>
-              </a:rPr>
-              <a:t>L'OBJET DE CETTE DEMI-HEURE — Non pas faire de vous un ingénieur. Faire en sorte que lorsque votre office
-rédige un cahier des charges, achète un service ou explique une décision à un
-conseil, les mots du document signifient ce que le lecteur croit qu'ils signifient.</a:t>
-            </a:r>
-          </a:p>
-        </p:txBody>
-      </p:sp>
-      <p:sp>
-        <p:nvSpPr>
-          <p:cNvPr id="9" name="TextBox 8"/>
           <p:cNvSpPr txBox="1"/>
           <p:nvPr/>
         </p:nvSpPr>
@@ -5439,18 +5613,17 @@
         <p:spPr>
           <a:xfrm>
             <a:off x="0" y="0"/>
-            <a:ext cx="12191695" cy="6858000"/>
+            <a:ext cx="12191695" cy="60000"/>
           </a:xfrm>
           <a:prstGeom prst="rect">
             <a:avLst/>
           </a:prstGeom>
           <a:solidFill>
-            <a:srgbClr val="0B2545"/>
+            <a:srgbClr val="F2A900"/>
           </a:solidFill>
           <a:ln>
             <a:noFill/>
           </a:ln>
-          <a:effectLst/>
         </p:spPr>
         <p:style>
           <a:lnRef idx="1">
@@ -5483,7 +5656,7 @@
         <p:spPr>
           <a:xfrm>
             <a:off x="731520" y="502920"/>
-            <a:ext cx="10728655" cy="320040"/>
+            <a:ext cx="10728655" cy="914400"/>
           </a:xfrm>
           <a:prstGeom prst="rect">
             <a:avLst/>
@@ -5498,13 +5671,13 @@
           <a:p>
             <a:pPr algn="l"/>
             <a:r>
-              <a:rPr sz="1100" b="1">
-                <a:solidFill>
-                  <a:srgbClr val="F2A900"/>
+              <a:rPr sz="2800" b="1">
+                <a:solidFill>
+                  <a:srgbClr val="0B2545"/>
                 </a:solidFill>
                 <a:latin typeface="Segoe UI"/>
               </a:rPr>
-              <a:t>PARTIE 1</a:t>
+              <a:t>Chacune décrit un système différent</a:t>
             </a:r>
           </a:p>
         </p:txBody>
@@ -5517,8 +5690,8 @@
         </p:nvSpPr>
         <p:spPr>
           <a:xfrm>
-            <a:off x="731520" y="914400"/>
-            <a:ext cx="10728655" cy="914400"/>
+            <a:off x="731520" y="1371600"/>
+            <a:ext cx="10728655" cy="457200"/>
           </a:xfrm>
           <a:prstGeom prst="rect">
             <a:avLst/>
@@ -5533,48 +5706,69 @@
           <a:p>
             <a:pPr algn="l"/>
             <a:r>
-              <a:rPr sz="2800" b="1">
-                <a:solidFill>
-                  <a:srgbClr val="FFFFFF"/>
+              <a:rPr sz="1500" b="1">
+                <a:solidFill>
+                  <a:srgbClr val="1B7A43"/>
                 </a:solidFill>
                 <a:latin typeface="Segoe UI"/>
               </a:rPr>
-              <a:t>Le mécanisme unique en dessous</a:t>
-            </a:r>
-          </a:p>
-        </p:txBody>
-      </p:sp>
-      <p:sp>
-        <p:nvSpPr>
-          <p:cNvPr id="5" name="TextBox 4"/>
-          <p:cNvSpPr txBox="1"/>
-          <p:nvPr/>
-        </p:nvSpPr>
-        <p:spPr>
-          <a:xfrm>
-            <a:off x="731520" y="1783080"/>
-            <a:ext cx="10728655" cy="548640"/>
-          </a:xfrm>
-          <a:prstGeom prst="rect">
-            <a:avLst/>
-          </a:prstGeom>
-          <a:noFill/>
-        </p:spPr>
-        <p:txBody>
-          <a:bodyPr wrap="square">
-            <a:spAutoFit/>
-          </a:bodyPr>
-          <a:lstStyle/>
-          <a:p>
-            <a:pPr algn="l"/>
-            <a:r>
-              <a:rPr sz="1400" b="0">
-                <a:solidFill>
-                  <a:srgbClr val="DBE7E0"/>
+              <a:t>≠  Coût</a:t>
+            </a:r>
+          </a:p>
+        </p:txBody>
+      </p:sp>
+      <p:sp>
+        <p:nvSpPr>
+          <p:cNvPr id="5" name="Rectangle 4"/>
+          <p:cNvSpPr/>
+          <p:nvPr/>
+        </p:nvSpPr>
+        <p:spPr>
+          <a:xfrm>
+            <a:off x="731520" y="1920240"/>
+            <a:ext cx="10728655" cy="960120"/>
+          </a:xfrm>
+          <a:prstGeom prst="rect">
+            <a:avLst/>
+          </a:prstGeom>
+          <a:solidFill>
+            <a:srgbClr val="F4F8F5"/>
+          </a:solidFill>
+          <a:ln>
+            <a:solidFill>
+              <a:srgbClr val="1B7A43"/>
+            </a:solidFill>
+          </a:ln>
+          <a:effectLst/>
+        </p:spPr>
+        <p:style>
+          <a:lnRef idx="1">
+            <a:schemeClr val="accent1"/>
+          </a:lnRef>
+          <a:fillRef idx="3">
+            <a:schemeClr val="accent1"/>
+          </a:fillRef>
+          <a:effectRef idx="2">
+            <a:schemeClr val="accent1"/>
+          </a:effectRef>
+          <a:fontRef idx="minor">
+            <a:schemeClr val="lt1"/>
+          </a:fontRef>
+        </p:style>
+        <p:txBody>
+          <a:bodyPr rtlCol="0" anchor="ctr" wrap="square"/>
+          <a:lstStyle/>
+          <a:p>
+            <a:pPr algn="ctr"/>
+            <a:r>
+              <a:rPr sz="1200">
+                <a:solidFill>
+                  <a:srgbClr val="33403A"/>
                 </a:solidFill>
                 <a:latin typeface="Segoe UI"/>
               </a:rPr>
-              <a:t>Tout le reste de cette présentation repose sur une seule boucle.</a:t>
+              <a:t>CE QUE CETTE DEMI-HEURE VOUS ACHÈTE — Pas une compétence d'ingénieur. La capacité de lire une proposition et de savoir
+lequel de trois systèmes très différents elle décrit réellement.</a:t>
             </a:r>
           </a:p>
         </p:txBody>
@@ -5641,17 +5835,18 @@
         <p:spPr>
           <a:xfrm>
             <a:off x="0" y="0"/>
-            <a:ext cx="12191695" cy="60000"/>
+            <a:ext cx="12191695" cy="6858000"/>
           </a:xfrm>
           <a:prstGeom prst="rect">
             <a:avLst/>
           </a:prstGeom>
           <a:solidFill>
-            <a:srgbClr val="F2A900"/>
+            <a:srgbClr val="0B2545"/>
           </a:solidFill>
           <a:ln>
             <a:noFill/>
           </a:ln>
+          <a:effectLst/>
         </p:spPr>
         <p:style>
           <a:lnRef idx="1">
@@ -5684,7 +5879,7 @@
         <p:spPr>
           <a:xfrm>
             <a:off x="731520" y="502920"/>
-            <a:ext cx="10728655" cy="914400"/>
+            <a:ext cx="10728655" cy="320040"/>
           </a:xfrm>
           <a:prstGeom prst="rect">
             <a:avLst/>
@@ -5699,85 +5894,27 @@
           <a:p>
             <a:pPr algn="l"/>
             <a:r>
-              <a:rPr sz="2800" b="1">
-                <a:solidFill>
-                  <a:srgbClr val="0B2545"/>
+              <a:rPr sz="1100" b="1">
+                <a:solidFill>
+                  <a:srgbClr val="F2A900"/>
                 </a:solidFill>
                 <a:latin typeface="Segoe UI"/>
               </a:rPr>
-              <a:t>Ce que fait réellement un modèle de langage</a:t>
-            </a:r>
-          </a:p>
-        </p:txBody>
-      </p:sp>
-      <p:sp>
-        <p:nvSpPr>
-          <p:cNvPr id="4" name="Rectangle 3"/>
-          <p:cNvSpPr/>
-          <p:nvPr/>
-        </p:nvSpPr>
-        <p:spPr>
-          <a:xfrm>
-            <a:off x="731520" y="1371600"/>
-            <a:ext cx="10728655" cy="960120"/>
-          </a:xfrm>
-          <a:prstGeom prst="rect">
-            <a:avLst/>
-          </a:prstGeom>
-          <a:solidFill>
-            <a:srgbClr val="F4F8F5"/>
-          </a:solidFill>
-          <a:ln>
-            <a:solidFill>
-              <a:srgbClr val="1B7A43"/>
-            </a:solidFill>
-          </a:ln>
-          <a:effectLst/>
-        </p:spPr>
-        <p:style>
-          <a:lnRef idx="1">
-            <a:schemeClr val="accent1"/>
-          </a:lnRef>
-          <a:fillRef idx="3">
-            <a:schemeClr val="accent1"/>
-          </a:fillRef>
-          <a:effectRef idx="2">
-            <a:schemeClr val="accent1"/>
-          </a:effectRef>
-          <a:fontRef idx="minor">
-            <a:schemeClr val="lt1"/>
-          </a:fontRef>
-        </p:style>
-        <p:txBody>
-          <a:bodyPr rtlCol="0" anchor="ctr" wrap="square"/>
-          <a:lstStyle/>
-          <a:p>
-            <a:pPr algn="ctr"/>
-            <a:r>
-              <a:rPr sz="1200">
-                <a:solidFill>
-                  <a:srgbClr val="33403A"/>
-                </a:solidFill>
-                <a:latin typeface="Segoe UI"/>
-              </a:rPr>
-              <a:t>RELISEZ CETTE DERNIÈRE LIGNE — Un modèle de langage n'est pas une base de connaissances dotée d'une interface
-conversationnelle. C'est un prédicteur de token suivant. Il produit la
- continuation la plus plausible , et plausibilité et vérité coïncident la
-plupart du temps — ce qui rend précisément les divergences dangereuses.</a:t>
-            </a:r>
-          </a:p>
-        </p:txBody>
-      </p:sp>
-      <p:sp>
-        <p:nvSpPr>
-          <p:cNvPr id="5" name="TextBox 4"/>
+              <a:t>PARTIE 1 SUR 3</a:t>
+            </a:r>
+          </a:p>
+        </p:txBody>
+      </p:sp>
+      <p:sp>
+        <p:nvSpPr>
+          <p:cNvPr id="4" name="TextBox 3"/>
           <p:cNvSpPr txBox="1"/>
           <p:nvPr/>
         </p:nvSpPr>
         <p:spPr>
           <a:xfrm>
-            <a:off x="731520" y="2468880"/>
-            <a:ext cx="10728655" cy="640080"/>
+            <a:off x="731520" y="914400"/>
+            <a:ext cx="10728655" cy="914400"/>
           </a:xfrm>
           <a:prstGeom prst="rect">
             <a:avLst/>
@@ -5792,13 +5929,48 @@
           <a:p>
             <a:pPr algn="l"/>
             <a:r>
-              <a:rPr sz="1100" b="0">
-                <a:solidFill>
-                  <a:srgbClr val="6B7B75"/>
+              <a:rPr sz="2800" b="1">
+                <a:solidFill>
+                  <a:srgbClr val="FFFFFF"/>
                 </a:solidFill>
                 <a:latin typeface="Segoe UI"/>
               </a:rPr>
-              <a:t>FIGURE — capturez la diapositive 4 du deck HTML et collez-la ici.</a:t>
+              <a:t>Le mécanisme unique en dessous</a:t>
+            </a:r>
+          </a:p>
+        </p:txBody>
+      </p:sp>
+      <p:sp>
+        <p:nvSpPr>
+          <p:cNvPr id="5" name="TextBox 4"/>
+          <p:cNvSpPr txBox="1"/>
+          <p:nvPr/>
+        </p:nvSpPr>
+        <p:spPr>
+          <a:xfrm>
+            <a:off x="731520" y="1783080"/>
+            <a:ext cx="10728655" cy="548640"/>
+          </a:xfrm>
+          <a:prstGeom prst="rect">
+            <a:avLst/>
+          </a:prstGeom>
+          <a:noFill/>
+        </p:spPr>
+        <p:txBody>
+          <a:bodyPr wrap="square">
+            <a:spAutoFit/>
+          </a:bodyPr>
+          <a:lstStyle/>
+          <a:p>
+            <a:pPr algn="l"/>
+            <a:r>
+              <a:rPr sz="1400" b="0">
+                <a:solidFill>
+                  <a:srgbClr val="DBE7E0"/>
+                </a:solidFill>
+                <a:latin typeface="Segoe UI"/>
+              </a:rPr>
+              <a:t>Tout le reste aujourd'hui repose sur une seule boucle.</a:t>
             </a:r>
           </a:p>
         </p:txBody>
@@ -5865,18 +6037,17 @@
         <p:spPr>
           <a:xfrm>
             <a:off x="0" y="0"/>
-            <a:ext cx="12191695" cy="6858000"/>
+            <a:ext cx="12191695" cy="60000"/>
           </a:xfrm>
           <a:prstGeom prst="rect">
             <a:avLst/>
           </a:prstGeom>
           <a:solidFill>
-            <a:srgbClr val="0B2545"/>
+            <a:srgbClr val="F2A900"/>
           </a:solidFill>
           <a:ln>
             <a:noFill/>
           </a:ln>
-          <a:effectLst/>
         </p:spPr>
         <p:style>
           <a:lnRef idx="1">
@@ -5909,7 +6080,7 @@
         <p:spPr>
           <a:xfrm>
             <a:off x="731520" y="502920"/>
-            <a:ext cx="10728655" cy="320040"/>
+            <a:ext cx="10728655" cy="914400"/>
           </a:xfrm>
           <a:prstGeom prst="rect">
             <a:avLst/>
@@ -5924,13 +6095,13 @@
           <a:p>
             <a:pPr algn="l"/>
             <a:r>
-              <a:rPr sz="1100" b="1">
-                <a:solidFill>
-                  <a:srgbClr val="F2A900"/>
+              <a:rPr sz="2800" b="1">
+                <a:solidFill>
+                  <a:srgbClr val="0B2545"/>
                 </a:solidFill>
                 <a:latin typeface="Segoe UI"/>
               </a:rPr>
-              <a:t>PARTIE 2</a:t>
+              <a:t>Ce que fait réellement un modèle de langage</a:t>
             </a:r>
           </a:p>
         </p:txBody>
@@ -5943,8 +6114,8 @@
         </p:nvSpPr>
         <p:spPr>
           <a:xfrm>
-            <a:off x="731520" y="914400"/>
-            <a:ext cx="10728655" cy="914400"/>
+            <a:off x="731520" y="1371600"/>
+            <a:ext cx="10728655" cy="640080"/>
           </a:xfrm>
           <a:prstGeom prst="rect">
             <a:avLst/>
@@ -5959,13 +6130,13 @@
           <a:p>
             <a:pPr algn="l"/>
             <a:r>
-              <a:rPr sz="2800" b="1">
-                <a:solidFill>
-                  <a:srgbClr val="FFFFFF"/>
+              <a:rPr sz="1100" b="0">
+                <a:solidFill>
+                  <a:srgbClr val="6B7B75"/>
                 </a:solidFill>
                 <a:latin typeface="Segoe UI"/>
               </a:rPr>
-              <a:t>Trois façons de le rendre utile</a:t>
+              <a:t>FIGURE — capturez la diapositive 5 du deck HTML et collez-la ici.</a:t>
             </a:r>
           </a:p>
         </p:txBody>
@@ -5973,41 +6144,6 @@
       <p:sp>
         <p:nvSpPr>
           <p:cNvPr id="5" name="TextBox 4"/>
-          <p:cNvSpPr txBox="1"/>
-          <p:nvPr/>
-        </p:nvSpPr>
-        <p:spPr>
-          <a:xfrm>
-            <a:off x="731520" y="1783080"/>
-            <a:ext cx="10728655" cy="548640"/>
-          </a:xfrm>
-          <a:prstGeom prst="rect">
-            <a:avLst/>
-          </a:prstGeom>
-          <a:noFill/>
-        </p:spPr>
-        <p:txBody>
-          <a:bodyPr wrap="square">
-            <a:spAutoFit/>
-          </a:bodyPr>
-          <a:lstStyle/>
-          <a:p>
-            <a:pPr algn="l"/>
-            <a:r>
-              <a:rPr sz="1400" b="0">
-                <a:solidFill>
-                  <a:srgbClr val="DBE7E0"/>
-                </a:solidFill>
-                <a:latin typeface="Segoe UI"/>
-              </a:rPr>
-              <a:t>Prompt, récupération, réentraînement — dans cet ordre, toujours.</a:t>
-            </a:r>
-          </a:p>
-        </p:txBody>
-      </p:sp>
-      <p:sp>
-        <p:nvSpPr>
-          <p:cNvPr id="6" name="TextBox 5"/>
           <p:cNvSpPr txBox="1"/>
           <p:nvPr/>
         </p:nvSpPr>
@@ -6110,7 +6246,7 @@
         <p:spPr>
           <a:xfrm>
             <a:off x="731520" y="502920"/>
-            <a:ext cx="10728655" cy="914400"/>
+            <a:ext cx="10728655" cy="320040"/>
           </a:xfrm>
           <a:prstGeom prst="rect">
             <a:avLst/>
@@ -6125,87 +6261,27 @@
           <a:p>
             <a:pPr algn="l"/>
             <a:r>
-              <a:rPr sz="2800" b="1">
-                <a:solidFill>
-                  <a:srgbClr val="0B2545"/>
+              <a:rPr sz="1100" b="1">
+                <a:solidFill>
+                  <a:srgbClr val="1B7A43"/>
                 </a:solidFill>
                 <a:latin typeface="Segoe UI"/>
               </a:rPr>
-              <a:t>Les trois leviers, et sur quoi chacun agit</a:t>
-            </a:r>
-          </a:p>
-        </p:txBody>
-      </p:sp>
-      <p:sp>
-        <p:nvSpPr>
-          <p:cNvPr id="4" name="Rectangle 3"/>
-          <p:cNvSpPr/>
-          <p:nvPr/>
-        </p:nvSpPr>
-        <p:spPr>
-          <a:xfrm>
-            <a:off x="731520" y="1371600"/>
-            <a:ext cx="10728655" cy="960120"/>
-          </a:xfrm>
-          <a:prstGeom prst="rect">
-            <a:avLst/>
-          </a:prstGeom>
-          <a:solidFill>
-            <a:srgbClr val="F4F8F5"/>
-          </a:solidFill>
-          <a:ln>
-            <a:solidFill>
-              <a:srgbClr val="1B7A43"/>
-            </a:solidFill>
-          </a:ln>
-          <a:effectLst/>
-        </p:spPr>
-        <p:style>
-          <a:lnRef idx="1">
-            <a:schemeClr val="accent1"/>
-          </a:lnRef>
-          <a:fillRef idx="3">
-            <a:schemeClr val="accent1"/>
-          </a:fillRef>
-          <a:effectRef idx="2">
-            <a:schemeClr val="accent1"/>
-          </a:effectRef>
-          <a:fontRef idx="minor">
-            <a:schemeClr val="lt1"/>
-          </a:fontRef>
-        </p:style>
-        <p:txBody>
-          <a:bodyPr rtlCol="0" anchor="ctr" wrap="square"/>
-          <a:lstStyle/>
-          <a:p>
-            <a:pPr algn="ctr"/>
-            <a:r>
-              <a:rPr sz="1200">
-                <a:solidFill>
-                  <a:srgbClr val="33403A"/>
-                </a:solidFill>
-                <a:latin typeface="Segoe UI"/>
-              </a:rPr>
-              <a:t>« NOUS ALLONS AFFINER LE MODÈLE SUR NOS DONNÉES POUR QU'IL CONNAISSE NOS STATISTIQUES » — C'est la phrase de la diapositive 2, et elle désigne le mauvais levier. L'affinage
-apprend à un modèle à  écrire comme  votre office ; il ne lui apprend pas
-de façon fiable à  connaître  vos chiffres, et il ne vous donne aucun moyen
-de citer une source. Le besoin derrière cette phrase est presque toujours le
- RAG  — moins cher, plus rapide, actualisable dès qu'un chiffre est
-révisé, et produisant une réponse traçable jusqu'à un document.</a:t>
-            </a:r>
-          </a:p>
-        </p:txBody>
-      </p:sp>
-      <p:sp>
-        <p:nvSpPr>
-          <p:cNvPr id="5" name="TextBox 4"/>
+              <a:t>LA CONSÉQUENCE</a:t>
+            </a:r>
+          </a:p>
+        </p:txBody>
+      </p:sp>
+      <p:sp>
+        <p:nvSpPr>
+          <p:cNvPr id="4" name="TextBox 3"/>
           <p:cNvSpPr txBox="1"/>
           <p:nvPr/>
         </p:nvSpPr>
         <p:spPr>
           <a:xfrm>
-            <a:off x="731520" y="2468880"/>
-            <a:ext cx="10728655" cy="640080"/>
+            <a:off x="731520" y="914400"/>
+            <a:ext cx="10728655" cy="548640"/>
           </a:xfrm>
           <a:prstGeom prst="rect">
             <a:avLst/>
@@ -6220,20 +6296,22 @@
           <a:p>
             <a:pPr algn="l"/>
             <a:r>
-              <a:rPr sz="1100" b="0">
-                <a:solidFill>
-                  <a:srgbClr val="6B7B75"/>
+              <a:rPr sz="1400" b="0">
+                <a:solidFill>
+                  <a:srgbClr val="33403A"/>
                 </a:solidFill>
                 <a:latin typeface="Segoe UI"/>
               </a:rPr>
-              <a:t>FIGURE — capturez la diapositive 6 du deck HTML et collez-la ici.</a:t>
-            </a:r>
-          </a:p>
-        </p:txBody>
-      </p:sp>
-      <p:sp>
-        <p:nvSpPr>
-          <p:cNvPr id="6" name="TextBox 5"/>
+              <a:t>Plausible et vrai coïncident la plupart du temps. C'est précisément ce qui rend
+les divergences dangereuses — et pourquoi chaque usage de cet atelier est
+enveloppé d'une étape de vérification.</a:t>
+            </a:r>
+          </a:p>
+        </p:txBody>
+      </p:sp>
+      <p:sp>
+        <p:nvSpPr>
+          <p:cNvPr id="5" name="TextBox 4"/>
           <p:cNvSpPr txBox="1"/>
           <p:nvPr/>
         </p:nvSpPr>
@@ -6293,17 +6371,18 @@
         <p:spPr>
           <a:xfrm>
             <a:off x="0" y="0"/>
-            <a:ext cx="12191695" cy="60000"/>
+            <a:ext cx="12191695" cy="6858000"/>
           </a:xfrm>
           <a:prstGeom prst="rect">
             <a:avLst/>
           </a:prstGeom>
           <a:solidFill>
-            <a:srgbClr val="F2A900"/>
+            <a:srgbClr val="0B2545"/>
           </a:solidFill>
           <a:ln>
             <a:noFill/>
           </a:ln>
+          <a:effectLst/>
         </p:spPr>
         <p:style>
           <a:lnRef idx="1">
@@ -6336,7 +6415,7 @@
         <p:spPr>
           <a:xfrm>
             <a:off x="731520" y="502920"/>
-            <a:ext cx="10728655" cy="914400"/>
+            <a:ext cx="10728655" cy="320040"/>
           </a:xfrm>
           <a:prstGeom prst="rect">
             <a:avLst/>
@@ -6351,84 +6430,27 @@
           <a:p>
             <a:pPr algn="l"/>
             <a:r>
-              <a:rPr sz="2800" b="1">
-                <a:solidFill>
-                  <a:srgbClr val="0B2545"/>
+              <a:rPr sz="1100" b="1">
+                <a:solidFill>
+                  <a:srgbClr val="F2A900"/>
                 </a:solidFill>
                 <a:latin typeface="Segoe UI"/>
               </a:rPr>
-              <a:t>Le RAG, dans la forme que vous construirez cet après-midi</a:t>
-            </a:r>
-          </a:p>
-        </p:txBody>
-      </p:sp>
-      <p:sp>
-        <p:nvSpPr>
-          <p:cNvPr id="4" name="Rectangle 3"/>
-          <p:cNvSpPr/>
-          <p:nvPr/>
-        </p:nvSpPr>
-        <p:spPr>
-          <a:xfrm>
-            <a:off x="731520" y="1371600"/>
-            <a:ext cx="10728655" cy="960120"/>
-          </a:xfrm>
-          <a:prstGeom prst="rect">
-            <a:avLst/>
-          </a:prstGeom>
-          <a:solidFill>
-            <a:srgbClr val="F4F8F5"/>
-          </a:solidFill>
-          <a:ln>
-            <a:solidFill>
-              <a:srgbClr val="1B7A43"/>
-            </a:solidFill>
-          </a:ln>
-          <a:effectLst/>
-        </p:spPr>
-        <p:style>
-          <a:lnRef idx="1">
-            <a:schemeClr val="accent1"/>
-          </a:lnRef>
-          <a:fillRef idx="3">
-            <a:schemeClr val="accent1"/>
-          </a:fillRef>
-          <a:effectRef idx="2">
-            <a:schemeClr val="accent1"/>
-          </a:effectRef>
-          <a:fontRef idx="minor">
-            <a:schemeClr val="lt1"/>
-          </a:fontRef>
-        </p:style>
-        <p:txBody>
-          <a:bodyPr rtlCol="0" anchor="ctr" wrap="square"/>
-          <a:lstStyle/>
-          <a:p>
-            <a:pPr algn="ctr"/>
-            <a:r>
-              <a:rPr sz="1200">
-                <a:solidFill>
-                  <a:srgbClr val="33403A"/>
-                </a:solidFill>
-                <a:latin typeface="Segoe UI"/>
-              </a:rPr>
-              <a:t>POURQUOI UN OFFICE STATISTIQUE DOIT S'INTÉRESSER PRÉCISÉMENT À L'ÉTAPE 3 — Une réponse citant le paragraphe dont elle provient se vérifie en dix secondes
-par un humain. Une réponse sans source doit être crue ou refaite. Une seule des
-deux est compatible avec une publication sous marque officielle.</a:t>
-            </a:r>
-          </a:p>
-        </p:txBody>
-      </p:sp>
-      <p:sp>
-        <p:nvSpPr>
-          <p:cNvPr id="5" name="TextBox 4"/>
+              <a:t>PARTIE 2 SUR 3</a:t>
+            </a:r>
+          </a:p>
+        </p:txBody>
+      </p:sp>
+      <p:sp>
+        <p:nvSpPr>
+          <p:cNvPr id="4" name="TextBox 3"/>
           <p:cNvSpPr txBox="1"/>
           <p:nvPr/>
         </p:nvSpPr>
         <p:spPr>
           <a:xfrm>
-            <a:off x="731520" y="2468880"/>
-            <a:ext cx="10728655" cy="640080"/>
+            <a:off x="731520" y="914400"/>
+            <a:ext cx="10728655" cy="914400"/>
           </a:xfrm>
           <a:prstGeom prst="rect">
             <a:avLst/>
@@ -6443,13 +6465,48 @@
           <a:p>
             <a:pPr algn="l"/>
             <a:r>
-              <a:rPr sz="1100" b="0">
-                <a:solidFill>
-                  <a:srgbClr val="6B7B75"/>
+              <a:rPr sz="2800" b="1">
+                <a:solidFill>
+                  <a:srgbClr val="FFFFFF"/>
                 </a:solidFill>
                 <a:latin typeface="Segoe UI"/>
               </a:rPr>
-              <a:t>FIGURE — capturez la diapositive 7 du deck HTML et collez-la ici.</a:t>
+              <a:t>Trois façons de le rendre utile</a:t>
+            </a:r>
+          </a:p>
+        </p:txBody>
+      </p:sp>
+      <p:sp>
+        <p:nvSpPr>
+          <p:cNvPr id="5" name="TextBox 4"/>
+          <p:cNvSpPr txBox="1"/>
+          <p:nvPr/>
+        </p:nvSpPr>
+        <p:spPr>
+          <a:xfrm>
+            <a:off x="731520" y="1783080"/>
+            <a:ext cx="10728655" cy="548640"/>
+          </a:xfrm>
+          <a:prstGeom prst="rect">
+            <a:avLst/>
+          </a:prstGeom>
+          <a:noFill/>
+        </p:spPr>
+        <p:txBody>
+          <a:bodyPr wrap="square">
+            <a:spAutoFit/>
+          </a:bodyPr>
+          <a:lstStyle/>
+          <a:p>
+            <a:pPr algn="l"/>
+            <a:r>
+              <a:rPr sz="1400" b="0">
+                <a:solidFill>
+                  <a:srgbClr val="DBE7E0"/>
+                </a:solidFill>
+                <a:latin typeface="Segoe UI"/>
+              </a:rPr>
+              <a:t>Prompt, récupération, réentraînement — dans cet ordre, toujours.</a:t>
             </a:r>
           </a:p>
         </p:txBody>
@@ -6516,18 +6573,17 @@
         <p:spPr>
           <a:xfrm>
             <a:off x="0" y="0"/>
-            <a:ext cx="12191695" cy="6858000"/>
+            <a:ext cx="12191695" cy="60000"/>
           </a:xfrm>
           <a:prstGeom prst="rect">
             <a:avLst/>
           </a:prstGeom>
           <a:solidFill>
-            <a:srgbClr val="0B2545"/>
+            <a:srgbClr val="F2A900"/>
           </a:solidFill>
           <a:ln>
             <a:noFill/>
           </a:ln>
-          <a:effectLst/>
         </p:spPr>
         <p:style>
           <a:lnRef idx="1">
@@ -6560,7 +6616,7 @@
         <p:spPr>
           <a:xfrm>
             <a:off x="731520" y="502920"/>
-            <a:ext cx="10728655" cy="320040"/>
+            <a:ext cx="10728655" cy="914400"/>
           </a:xfrm>
           <a:prstGeom prst="rect">
             <a:avLst/>
@@ -6575,13 +6631,13 @@
           <a:p>
             <a:pPr algn="l"/>
             <a:r>
-              <a:rPr sz="1100" b="1">
-                <a:solidFill>
-                  <a:srgbClr val="F2A900"/>
+              <a:rPr sz="2800" b="1">
+                <a:solidFill>
+                  <a:srgbClr val="0B2545"/>
                 </a:solidFill>
                 <a:latin typeface="Segoe UI"/>
               </a:rPr>
-              <a:t>PARTIE 3</a:t>
+              <a:t>Trois leviers, trois cibles différentes</a:t>
             </a:r>
           </a:p>
         </p:txBody>
@@ -6594,8 +6650,8 @@
         </p:nvSpPr>
         <p:spPr>
           <a:xfrm>
-            <a:off x="731520" y="914400"/>
-            <a:ext cx="10728655" cy="914400"/>
+            <a:off x="731520" y="1371600"/>
+            <a:ext cx="10728655" cy="640080"/>
           </a:xfrm>
           <a:prstGeom prst="rect">
             <a:avLst/>
@@ -6610,13 +6666,13 @@
           <a:p>
             <a:pPr algn="l"/>
             <a:r>
-              <a:rPr sz="2800" b="1">
-                <a:solidFill>
-                  <a:srgbClr val="FFFFFF"/>
+              <a:rPr sz="1100" b="0">
+                <a:solidFill>
+                  <a:srgbClr val="6B7B75"/>
                 </a:solidFill>
                 <a:latin typeface="Segoe UI"/>
               </a:rPr>
-              <a:t>Les agents, et où se place la supervision</a:t>
+              <a:t>FIGURE — capturez la diapositive 8 du deck HTML et collez-la ici.</a:t>
             </a:r>
           </a:p>
         </p:txBody>
@@ -6624,41 +6680,6 @@
       <p:sp>
         <p:nvSpPr>
           <p:cNvPr id="5" name="TextBox 4"/>
-          <p:cNvSpPr txBox="1"/>
-          <p:nvPr/>
-        </p:nvSpPr>
-        <p:spPr>
-          <a:xfrm>
-            <a:off x="731520" y="1783080"/>
-            <a:ext cx="10728655" cy="548640"/>
-          </a:xfrm>
-          <a:prstGeom prst="rect">
-            <a:avLst/>
-          </a:prstGeom>
-          <a:noFill/>
-        </p:spPr>
-        <p:txBody>
-          <a:bodyPr wrap="square">
-            <a:spAutoFit/>
-          </a:bodyPr>
-          <a:lstStyle/>
-          <a:p>
-            <a:pPr algn="l"/>
-            <a:r>
-              <a:rPr sz="1400" b="0">
-                <a:solidFill>
-                  <a:srgbClr val="DBE7E0"/>
-                </a:solidFill>
-                <a:latin typeface="Segoe UI"/>
-              </a:rPr>
-              <a:t>Le pas de « répond à une question » à « accomplit une action ».</a:t>
-            </a:r>
-          </a:p>
-        </p:txBody>
-      </p:sp>
-      <p:sp>
-        <p:nvSpPr>
-          <p:cNvPr id="6" name="TextBox 5"/>
           <p:cNvSpPr txBox="1"/>
           <p:nvPr/>
         </p:nvSpPr>
@@ -6761,7 +6782,7 @@
         <p:spPr>
           <a:xfrm>
             <a:off x="731520" y="502920"/>
-            <a:ext cx="10728655" cy="914400"/>
+            <a:ext cx="10728655" cy="320040"/>
           </a:xfrm>
           <a:prstGeom prst="rect">
             <a:avLst/>
@@ -6776,26 +6797,61 @@
           <a:p>
             <a:pPr algn="l"/>
             <a:r>
-              <a:rPr sz="2800" b="1">
-                <a:solidFill>
-                  <a:srgbClr val="0B2545"/>
+              <a:rPr sz="1100" b="1">
+                <a:solidFill>
+                  <a:srgbClr val="1B7A43"/>
                 </a:solidFill>
                 <a:latin typeface="Segoe UI"/>
               </a:rPr>
-              <a:t>Assistant → agent : un seul changement, et il n'est pas mince</a:t>
-            </a:r>
-          </a:p>
-        </p:txBody>
-      </p:sp>
-      <p:sp>
-        <p:nvSpPr>
-          <p:cNvPr id="4" name="Rectangle 3"/>
+              <a:t>RETOUR À LA TROISIÈME PHRASE</a:t>
+            </a:r>
+          </a:p>
+        </p:txBody>
+      </p:sp>
+      <p:sp>
+        <p:nvSpPr>
+          <p:cNvPr id="4" name="TextBox 3"/>
+          <p:cNvSpPr txBox="1"/>
+          <p:nvPr/>
+        </p:nvSpPr>
+        <p:spPr>
+          <a:xfrm>
+            <a:off x="731520" y="914400"/>
+            <a:ext cx="10728655" cy="914400"/>
+          </a:xfrm>
+          <a:prstGeom prst="rect">
+            <a:avLst/>
+          </a:prstGeom>
+          <a:noFill/>
+        </p:spPr>
+        <p:txBody>
+          <a:bodyPr wrap="square">
+            <a:spAutoFit/>
+          </a:bodyPr>
+          <a:lstStyle/>
+          <a:p>
+            <a:pPr algn="l"/>
+            <a:r>
+              <a:rPr sz="2800" b="1">
+                <a:solidFill>
+                  <a:srgbClr val="0B2545"/>
+                </a:solidFill>
+                <a:latin typeface="Segoe UI"/>
+              </a:rPr>
+              <a:t>« L'affiner pour qu'il connaisse nos statistiques »</a:t>
+            </a:r>
+          </a:p>
+        </p:txBody>
+      </p:sp>
+      <p:sp>
+        <p:nvSpPr>
+          <p:cNvPr id="5" name="Rectangle 4"/>
           <p:cNvSpPr/>
           <p:nvPr/>
         </p:nvSpPr>
         <p:spPr>
           <a:xfrm>
-            <a:off x="731520" y="1371600"/>
+            <a:off x="731520" y="1783080"/>
             <a:ext cx="10728655" cy="960120"/>
           </a:xfrm>
           <a:prstGeom prst="rect">
@@ -6837,369 +6893,15 @@
                 </a:solidFill>
                 <a:latin typeface="Segoe UI"/>
               </a:rPr>
-              <a:t>LE MOT « OUTIL » PORTE BEAUCOUP ICI — Un outil est toute fonction que vous autorisez le modèle à appeler : une requête
-en base, une étape de récupération, une écriture de fichier, un courriel. Le
-modèle n'exécute pas l'outil —  c'est votre code qui l'exécute , après que
-le modèle l'a demandé. C'est dans cet interstice que vivent tous les points
-d'approbation, journaux d'audit et contrôles de sûreté. Concevez-le avant d'en
-avoir besoin.</a:t>
-            </a:r>
-          </a:p>
-        </p:txBody>
-      </p:sp>
-      <p:graphicFrame>
-        <p:nvGraphicFramePr>
-          <p:cNvPr id="5" name="Table 4"/>
-          <p:cNvGraphicFramePr>
-            <a:graphicFrameLocks noGrp="1"/>
-          </p:cNvGraphicFramePr>
-          <p:nvPr/>
-        </p:nvGraphicFramePr>
-        <p:xfrm>
-          <a:off x="731520" y="2468880"/>
-          <a:ext cx="10728655" cy="1755648"/>
-        </p:xfrm>
-        <a:graphic>
-          <a:graphicData uri="http://schemas.openxmlformats.org/drawingml/2006/table">
-            <a:tbl>
-              <a:tblPr firstRow="1" bandRow="1">
-                <a:tableStyleId>{5C22544A-7EE6-4342-B048-85BDC9FD1C3A}</a:tableStyleId>
-              </a:tblPr>
-              <a:tblGrid>
-                <a:gridCol w="3576218"/>
-                <a:gridCol w="3576218"/>
-                <a:gridCol w="3576219"/>
-              </a:tblGrid>
-              <a:tr h="292608">
-                <a:tc>
-                  <a:txBody>
-                    <a:bodyPr/>
-                    <a:lstStyle/>
-                    <a:p/>
-                  </a:txBody>
-                  <a:tcPr/>
-                </a:tc>
-                <a:tc>
-                  <a:txBody>
-                    <a:bodyPr/>
-                    <a:lstStyle/>
-                    <a:p>
-                      <a:r>
-                        <a:rPr sz="1000" b="1">
-                          <a:solidFill>
-                            <a:srgbClr val="FFFFFF"/>
-                          </a:solidFill>
-                          <a:latin typeface="Segoe UI"/>
-                        </a:rPr>
-                        <a:t>Assistant (ce que vous construisez à 14h45)</a:t>
-                      </a:r>
-                    </a:p>
-                  </a:txBody>
-                  <a:tcPr/>
-                </a:tc>
-                <a:tc>
-                  <a:txBody>
-                    <a:bodyPr/>
-                    <a:lstStyle/>
-                    <a:p>
-                      <a:r>
-                        <a:rPr sz="1000" b="1">
-                          <a:solidFill>
-                            <a:srgbClr val="FFFFFF"/>
-                          </a:solidFill>
-                          <a:latin typeface="Segoe UI"/>
-                        </a:rPr>
-                        <a:t>Agent (ce que vous construisez à 15h45)</a:t>
-                      </a:r>
-                    </a:p>
-                  </a:txBody>
-                  <a:tcPr/>
-                </a:tc>
-              </a:tr>
-              <a:tr h="292608">
-                <a:tc>
-                  <a:txBody>
-                    <a:bodyPr/>
-                    <a:lstStyle/>
-                    <a:p>
-                      <a:r>
-                        <a:rPr sz="1000" b="0">
-                          <a:solidFill>
-                            <a:srgbClr val="33403A"/>
-                          </a:solidFill>
-                          <a:latin typeface="Segoe UI"/>
-                        </a:rPr>
-                        <a:t>Ce qu'il fait</a:t>
-                      </a:r>
-                    </a:p>
-                  </a:txBody>
-                  <a:tcPr/>
-                </a:tc>
-                <a:tc>
-                  <a:txBody>
-                    <a:bodyPr/>
-                    <a:lstStyle/>
-                    <a:p>
-                      <a:r>
-                        <a:rPr sz="1000" b="0">
-                          <a:solidFill>
-                            <a:srgbClr val="33403A"/>
-                          </a:solidFill>
-                          <a:latin typeface="Segoe UI"/>
-                        </a:rPr>
-                        <a:t>Lit, puis rédige une réponse</a:t>
-                      </a:r>
-                    </a:p>
-                  </a:txBody>
-                  <a:tcPr/>
-                </a:tc>
-                <a:tc>
-                  <a:txBody>
-                    <a:bodyPr/>
-                    <a:lstStyle/>
-                    <a:p>
-                      <a:r>
-                        <a:rPr sz="1000" b="0">
-                          <a:solidFill>
-                            <a:srgbClr val="33403A"/>
-                          </a:solidFill>
-                          <a:latin typeface="Segoe UI"/>
-                        </a:rPr>
-                        <a:t>Lit, puis  décide quel outil appeler , l'appelle, lit le résultat, recommence</a:t>
-                      </a:r>
-                    </a:p>
-                  </a:txBody>
-                  <a:tcPr/>
-                </a:tc>
-              </a:tr>
-              <a:tr h="292608">
-                <a:tc>
-                  <a:txBody>
-                    <a:bodyPr/>
-                    <a:lstStyle/>
-                    <a:p>
-                      <a:r>
-                        <a:rPr sz="1000" b="0">
-                          <a:solidFill>
-                            <a:srgbClr val="33403A"/>
-                          </a:solidFill>
-                          <a:latin typeface="Segoe UI"/>
-                        </a:rPr>
-                        <a:t>Qui choisit les étapes</a:t>
-                      </a:r>
-                    </a:p>
-                  </a:txBody>
-                  <a:tcPr/>
-                </a:tc>
-                <a:tc>
-                  <a:txBody>
-                    <a:bodyPr/>
-                    <a:lstStyle/>
-                    <a:p>
-                      <a:r>
-                        <a:rPr sz="1000" b="0">
-                          <a:solidFill>
-                            <a:srgbClr val="33403A"/>
-                          </a:solidFill>
-                          <a:latin typeface="Segoe UI"/>
-                        </a:rPr>
-                        <a:t>Vous, en écrivant la chaîne</a:t>
-                      </a:r>
-                    </a:p>
-                  </a:txBody>
-                  <a:tcPr/>
-                </a:tc>
-                <a:tc>
-                  <a:txBody>
-                    <a:bodyPr/>
-                    <a:lstStyle/>
-                    <a:p>
-                      <a:r>
-                        <a:rPr sz="1000" b="0">
-                          <a:solidFill>
-                            <a:srgbClr val="33403A"/>
-                          </a:solidFill>
-                          <a:latin typeface="Segoe UI"/>
-                        </a:rPr>
-                        <a:t>Le modèle, à l'exécution</a:t>
-                      </a:r>
-                    </a:p>
-                  </a:txBody>
-                  <a:tcPr/>
-                </a:tc>
-              </a:tr>
-              <a:tr h="292608">
-                <a:tc>
-                  <a:txBody>
-                    <a:bodyPr/>
-                    <a:lstStyle/>
-                    <a:p>
-                      <a:r>
-                        <a:rPr sz="1000" b="0">
-                          <a:solidFill>
-                            <a:srgbClr val="33403A"/>
-                          </a:solidFill>
-                          <a:latin typeface="Segoe UI"/>
-                        </a:rPr>
-                        <a:t>À quoi ressemble un échec</a:t>
-                      </a:r>
-                    </a:p>
-                  </a:txBody>
-                  <a:tcPr/>
-                </a:tc>
-                <a:tc>
-                  <a:txBody>
-                    <a:bodyPr/>
-                    <a:lstStyle/>
-                    <a:p>
-                      <a:r>
-                        <a:rPr sz="1000" b="0">
-                          <a:solidFill>
-                            <a:srgbClr val="33403A"/>
-                          </a:solidFill>
-                          <a:latin typeface="Segoe UI"/>
-                        </a:rPr>
-                        <a:t>Une phrase fausse</a:t>
-                      </a:r>
-                    </a:p>
-                  </a:txBody>
-                  <a:tcPr/>
-                </a:tc>
-                <a:tc>
-                  <a:txBody>
-                    <a:bodyPr/>
-                    <a:lstStyle/>
-                    <a:p>
-                      <a:r>
-                        <a:rPr sz="1000" b="0">
-                          <a:solidFill>
-                            <a:srgbClr val="33403A"/>
-                          </a:solidFill>
-                          <a:latin typeface="Segoe UI"/>
-                        </a:rPr>
-                        <a:t>Une phrase fausse, ou une  action  fausse, ou une boucle qui ne s'arrête pas</a:t>
-                      </a:r>
-                    </a:p>
-                  </a:txBody>
-                  <a:tcPr/>
-                </a:tc>
-              </a:tr>
-              <a:tr h="292608">
-                <a:tc>
-                  <a:txBody>
-                    <a:bodyPr/>
-                    <a:lstStyle/>
-                    <a:p>
-                      <a:r>
-                        <a:rPr sz="1000" b="0">
-                          <a:solidFill>
-                            <a:srgbClr val="33403A"/>
-                          </a:solidFill>
-                          <a:latin typeface="Segoe UI"/>
-                        </a:rPr>
-                        <a:t>Ce qu'il coûte</a:t>
-                      </a:r>
-                    </a:p>
-                  </a:txBody>
-                  <a:tcPr/>
-                </a:tc>
-                <a:tc>
-                  <a:txBody>
-                    <a:bodyPr/>
-                    <a:lstStyle/>
-                    <a:p>
-                      <a:r>
-                        <a:rPr sz="1000" b="0">
-                          <a:solidFill>
-                            <a:srgbClr val="33403A"/>
-                          </a:solidFill>
-                          <a:latin typeface="Segoe UI"/>
-                        </a:rPr>
-                        <a:t>Un appel au modèle</a:t>
-                      </a:r>
-                    </a:p>
-                  </a:txBody>
-                  <a:tcPr/>
-                </a:tc>
-                <a:tc>
-                  <a:txBody>
-                    <a:bodyPr/>
-                    <a:lstStyle/>
-                    <a:p>
-                      <a:r>
-                        <a:rPr sz="1000" b="0">
-                          <a:solidFill>
-                            <a:srgbClr val="33403A"/>
-                          </a:solidFill>
-                          <a:latin typeface="Segoe UI"/>
-                        </a:rPr>
-                        <a:t>Autant d'appels qu'il décide d'en faire</a:t>
-                      </a:r>
-                    </a:p>
-                  </a:txBody>
-                  <a:tcPr/>
-                </a:tc>
-              </a:tr>
-              <a:tr h="292608">
-                <a:tc>
-                  <a:txBody>
-                    <a:bodyPr/>
-                    <a:lstStyle/>
-                    <a:p>
-                      <a:r>
-                        <a:rPr sz="1000" b="0">
-                          <a:solidFill>
-                            <a:srgbClr val="33403A"/>
-                          </a:solidFill>
-                          <a:latin typeface="Segoe UI"/>
-                        </a:rPr>
-                        <a:t>Où se place l'humain</a:t>
-                      </a:r>
-                    </a:p>
-                  </a:txBody>
-                  <a:tcPr/>
-                </a:tc>
-                <a:tc>
-                  <a:txBody>
-                    <a:bodyPr/>
-                    <a:lstStyle/>
-                    <a:p>
-                      <a:r>
-                        <a:rPr sz="1000" b="0">
-                          <a:solidFill>
-                            <a:srgbClr val="33403A"/>
-                          </a:solidFill>
-                          <a:latin typeface="Segoe UI"/>
-                        </a:rPr>
-                        <a:t>Vérifier la sortie avant publication</a:t>
-                      </a:r>
-                    </a:p>
-                  </a:txBody>
-                  <a:tcPr/>
-                </a:tc>
-                <a:tc>
-                  <a:txBody>
-                    <a:bodyPr/>
-                    <a:lstStyle/>
-                    <a:p>
-                      <a:r>
-                        <a:rPr sz="1000" b="0">
-                          <a:solidFill>
-                            <a:srgbClr val="33403A"/>
-                          </a:solidFill>
-                          <a:latin typeface="Segoe UI"/>
-                        </a:rPr>
-                        <a:t>Vérifier la sortie  et  approuver les actions avant qu'elles n'aient lieu</a:t>
-                      </a:r>
-                    </a:p>
-                  </a:txBody>
-                  <a:tcPr/>
-                </a:tc>
-              </a:tr>
-            </a:tbl>
-          </a:graphicData>
-        </a:graphic>
-      </p:graphicFrame>
+              <a:t>CETTE PHRASE DÉSIGNE LE MAUVAIS LEVIER — L'affinage apprend à un modèle à  écrire comme  votre office. Il ne lui
+apprend pas à  connaître  vos chiffres, et ne permet pas de citer une
+source.  
+Le besoin réel est presque toujours le  RAG  : moins cher,
+actualisé dès qu'un chiffre est révisé, traçable jusqu'à un document.</a:t>
+            </a:r>
+          </a:p>
+        </p:txBody>
+      </p:sp>
       <p:sp>
         <p:nvSpPr>
           <p:cNvPr id="6" name="TextBox 5"/>

--- a/docs/slides/pptx/01-ai-family-tree-fr.pptx
+++ b/docs/slides/pptx/01-ai-family-tree-fr.pptx
@@ -6845,13 +6845,48 @@
       </p:sp>
       <p:sp>
         <p:nvSpPr>
-          <p:cNvPr id="5" name="Rectangle 4"/>
+          <p:cNvPr id="5" name="TextBox 4"/>
+          <p:cNvSpPr txBox="1"/>
+          <p:nvPr/>
+        </p:nvSpPr>
+        <p:spPr>
+          <a:xfrm>
+            <a:off x="731520" y="1783080"/>
+            <a:ext cx="10728655" cy="548640"/>
+          </a:xfrm>
+          <a:prstGeom prst="rect">
+            <a:avLst/>
+          </a:prstGeom>
+          <a:noFill/>
+        </p:spPr>
+        <p:txBody>
+          <a:bodyPr wrap="square">
+            <a:spAutoFit/>
+          </a:bodyPr>
+          <a:lstStyle/>
+          <a:p>
+            <a:pPr algn="l"/>
+            <a:r>
+              <a:rPr sz="1400" b="0">
+                <a:solidFill>
+                  <a:srgbClr val="33403A"/>
+                </a:solidFill>
+                <a:latin typeface="Segoe UI"/>
+              </a:rPr>
+              <a:t>La phrase la plus coûteuse de la salle.</a:t>
+            </a:r>
+          </a:p>
+        </p:txBody>
+      </p:sp>
+      <p:sp>
+        <p:nvSpPr>
+          <p:cNvPr id="6" name="Rectangle 5"/>
           <p:cNvSpPr/>
           <p:nvPr/>
         </p:nvSpPr>
         <p:spPr>
           <a:xfrm>
-            <a:off x="731520" y="1783080"/>
+            <a:off x="731520" y="2286000"/>
             <a:ext cx="10728655" cy="960120"/>
           </a:xfrm>
           <a:prstGeom prst="rect">
@@ -6904,7 +6939,7 @@
       </p:sp>
       <p:sp>
         <p:nvSpPr>
-          <p:cNvPr id="6" name="TextBox 5"/>
+          <p:cNvPr id="7" name="TextBox 6"/>
           <p:cNvSpPr txBox="1"/>
           <p:nvPr/>
         </p:nvSpPr>
